--- a/Presentation stage 2ème année.pptx
+++ b/Presentation stage 2ème année.pptx
@@ -122,6 +122,275 @@
 
 <file path=ppt/changesInfos/changesInfo1.xml><?xml version="1.0" encoding="utf-8"?>
 <pc:chgInfo xmlns:a="http://schemas.openxmlformats.org/drawingml/2006/main" xmlns:r="http://schemas.openxmlformats.org/officeDocument/2006/relationships" xmlns:ac="http://schemas.microsoft.com/office/drawing/2013/main/command" xmlns:pc="http://schemas.microsoft.com/office/powerpoint/2013/main/command">
+  <pc:docChgLst>
+    <pc:chgData name="Utilisateur invité" providerId="Windows Live" clId="Web-{7DF10C54-B4CE-12F0-0B1A-E95F9FB99A4A}"/>
+    <pc:docChg chg="delSld modSld">
+      <pc:chgData name="Utilisateur invité" userId="" providerId="Windows Live" clId="Web-{7DF10C54-B4CE-12F0-0B1A-E95F9FB99A4A}" dt="2026-01-28T08:29:23.553" v="20" actId="14100"/>
+      <pc:docMkLst>
+        <pc:docMk/>
+      </pc:docMkLst>
+      <pc:sldChg chg="del">
+        <pc:chgData name="Utilisateur invité" userId="" providerId="Windows Live" clId="Web-{7DF10C54-B4CE-12F0-0B1A-E95F9FB99A4A}" dt="2026-01-28T08:28:32.474" v="0"/>
+        <pc:sldMkLst>
+          <pc:docMk/>
+          <pc:sldMk cId="621877034" sldId="258"/>
+        </pc:sldMkLst>
+      </pc:sldChg>
+      <pc:sldChg chg="addSp modSp">
+        <pc:chgData name="Utilisateur invité" userId="" providerId="Windows Live" clId="Web-{7DF10C54-B4CE-12F0-0B1A-E95F9FB99A4A}" dt="2026-01-28T08:29:23.553" v="20" actId="14100"/>
+        <pc:sldMkLst>
+          <pc:docMk/>
+          <pc:sldMk cId="584521698" sldId="259"/>
+        </pc:sldMkLst>
+        <pc:spChg chg="add mod">
+          <ac:chgData name="Utilisateur invité" userId="" providerId="Windows Live" clId="Web-{7DF10C54-B4CE-12F0-0B1A-E95F9FB99A4A}" dt="2026-01-28T08:29:03.005" v="2" actId="14100"/>
+          <ac:spMkLst>
+            <pc:docMk/>
+            <pc:sldMk cId="584521698" sldId="259"/>
+            <ac:spMk id="10" creationId="{EF873B9A-616D-5CC7-3334-ABE8D8D3C3D6}"/>
+          </ac:spMkLst>
+        </pc:spChg>
+        <pc:spChg chg="add mod">
+          <ac:chgData name="Utilisateur invité" userId="" providerId="Windows Live" clId="Web-{7DF10C54-B4CE-12F0-0B1A-E95F9FB99A4A}" dt="2026-01-28T08:29:23.553" v="20" actId="14100"/>
+          <ac:spMkLst>
+            <pc:docMk/>
+            <pc:sldMk cId="584521698" sldId="259"/>
+            <ac:spMk id="18" creationId="{FD9642DC-D4D8-B585-769F-8801AFD83B7D}"/>
+          </ac:spMkLst>
+        </pc:spChg>
+      </pc:sldChg>
+    </pc:docChg>
+  </pc:docChgLst>
+  <pc:docChgLst>
+    <pc:chgData name="poke 953" userId="c913613eb4ac0ae9" providerId="LiveId" clId="{2BD3D7C0-2FD8-49BD-87B9-43617CBB1A57}"/>
+    <pc:docChg chg="custSel delSld modSld">
+      <pc:chgData name="poke 953" userId="c913613eb4ac0ae9" providerId="LiveId" clId="{2BD3D7C0-2FD8-49BD-87B9-43617CBB1A57}" dt="2026-04-29T12:37:44.556" v="189" actId="20577"/>
+      <pc:docMkLst>
+        <pc:docMk/>
+      </pc:docMkLst>
+      <pc:sldChg chg="addSp delSp modSp mod">
+        <pc:chgData name="poke 953" userId="c913613eb4ac0ae9" providerId="LiveId" clId="{2BD3D7C0-2FD8-49BD-87B9-43617CBB1A57}" dt="2026-04-29T12:37:09.411" v="186" actId="20577"/>
+        <pc:sldMkLst>
+          <pc:docMk/>
+          <pc:sldMk cId="584521698" sldId="259"/>
+        </pc:sldMkLst>
+        <pc:spChg chg="add del mod">
+          <ac:chgData name="poke 953" userId="c913613eb4ac0ae9" providerId="LiveId" clId="{2BD3D7C0-2FD8-49BD-87B9-43617CBB1A57}" dt="2026-04-29T06:48:38.915" v="23" actId="478"/>
+          <ac:spMkLst>
+            <pc:docMk/>
+            <pc:sldMk cId="584521698" sldId="259"/>
+            <ac:spMk id="3" creationId="{3D826BD1-9B7B-3BCA-BE35-26EA3803BA39}"/>
+          </ac:spMkLst>
+        </pc:spChg>
+        <pc:spChg chg="add mod">
+          <ac:chgData name="poke 953" userId="c913613eb4ac0ae9" providerId="LiveId" clId="{2BD3D7C0-2FD8-49BD-87B9-43617CBB1A57}" dt="2026-04-29T09:41:48.046" v="24"/>
+          <ac:spMkLst>
+            <pc:docMk/>
+            <pc:sldMk cId="584521698" sldId="259"/>
+            <ac:spMk id="4" creationId="{FB61AF78-294F-5ADC-75CA-023A10110217}"/>
+          </ac:spMkLst>
+        </pc:spChg>
+        <pc:spChg chg="add mod">
+          <ac:chgData name="poke 953" userId="c913613eb4ac0ae9" providerId="LiveId" clId="{2BD3D7C0-2FD8-49BD-87B9-43617CBB1A57}" dt="2026-04-29T09:41:48.046" v="24"/>
+          <ac:spMkLst>
+            <pc:docMk/>
+            <pc:sldMk cId="584521698" sldId="259"/>
+            <ac:spMk id="5" creationId="{BB1ADA96-B725-BE34-E630-9D33E744B05D}"/>
+          </ac:spMkLst>
+        </pc:spChg>
+        <pc:spChg chg="add mod">
+          <ac:chgData name="poke 953" userId="c913613eb4ac0ae9" providerId="LiveId" clId="{2BD3D7C0-2FD8-49BD-87B9-43617CBB1A57}" dt="2026-04-29T09:41:48.046" v="24"/>
+          <ac:spMkLst>
+            <pc:docMk/>
+            <pc:sldMk cId="584521698" sldId="259"/>
+            <ac:spMk id="6" creationId="{A0142AEE-0C94-D858-7941-446787E7AEFC}"/>
+          </ac:spMkLst>
+        </pc:spChg>
+        <pc:spChg chg="add mod">
+          <ac:chgData name="poke 953" userId="c913613eb4ac0ae9" providerId="LiveId" clId="{2BD3D7C0-2FD8-49BD-87B9-43617CBB1A57}" dt="2026-04-29T09:41:48.046" v="24"/>
+          <ac:spMkLst>
+            <pc:docMk/>
+            <pc:sldMk cId="584521698" sldId="259"/>
+            <ac:spMk id="7" creationId="{73AD3AB8-5E12-3CB3-8868-C5B6BBFDA9C6}"/>
+          </ac:spMkLst>
+        </pc:spChg>
+        <pc:spChg chg="add mod">
+          <ac:chgData name="poke 953" userId="c913613eb4ac0ae9" providerId="LiveId" clId="{2BD3D7C0-2FD8-49BD-87B9-43617CBB1A57}" dt="2026-04-29T09:41:48.046" v="24"/>
+          <ac:spMkLst>
+            <pc:docMk/>
+            <pc:sldMk cId="584521698" sldId="259"/>
+            <ac:spMk id="8" creationId="{CAB10312-EDD1-1245-A148-89C5171DC268}"/>
+          </ac:spMkLst>
+        </pc:spChg>
+        <pc:spChg chg="add mod">
+          <ac:chgData name="poke 953" userId="c913613eb4ac0ae9" providerId="LiveId" clId="{2BD3D7C0-2FD8-49BD-87B9-43617CBB1A57}" dt="2026-04-29T09:41:48.046" v="24"/>
+          <ac:spMkLst>
+            <pc:docMk/>
+            <pc:sldMk cId="584521698" sldId="259"/>
+            <ac:spMk id="9" creationId="{8CFEDFC4-DF61-720D-28A9-0E4D4841C5F9}"/>
+          </ac:spMkLst>
+        </pc:spChg>
+        <pc:spChg chg="add del mod">
+          <ac:chgData name="poke 953" userId="c913613eb4ac0ae9" providerId="LiveId" clId="{2BD3D7C0-2FD8-49BD-87B9-43617CBB1A57}" dt="2026-04-29T09:41:52.162" v="25" actId="478"/>
+          <ac:spMkLst>
+            <pc:docMk/>
+            <pc:sldMk cId="584521698" sldId="259"/>
+            <ac:spMk id="15" creationId="{8F1FE9B9-8F10-3B15-6E52-ABB0813E0618}"/>
+          </ac:spMkLst>
+        </pc:spChg>
+        <pc:spChg chg="add del mod">
+          <ac:chgData name="poke 953" userId="c913613eb4ac0ae9" providerId="LiveId" clId="{2BD3D7C0-2FD8-49BD-87B9-43617CBB1A57}" dt="2026-04-29T09:41:52.162" v="25" actId="478"/>
+          <ac:spMkLst>
+            <pc:docMk/>
+            <pc:sldMk cId="584521698" sldId="259"/>
+            <ac:spMk id="17" creationId="{8C23E3C4-280F-CC1C-91C6-C9281D65EC19}"/>
+          </ac:spMkLst>
+        </pc:spChg>
+        <pc:spChg chg="add del mod">
+          <ac:chgData name="poke 953" userId="c913613eb4ac0ae9" providerId="LiveId" clId="{2BD3D7C0-2FD8-49BD-87B9-43617CBB1A57}" dt="2026-04-29T09:41:55.791" v="27" actId="478"/>
+          <ac:spMkLst>
+            <pc:docMk/>
+            <pc:sldMk cId="584521698" sldId="259"/>
+            <ac:spMk id="18" creationId="{5E276831-6B99-B87C-DB57-11631658E38D}"/>
+          </ac:spMkLst>
+        </pc:spChg>
+        <pc:spChg chg="add del mod">
+          <ac:chgData name="poke 953" userId="c913613eb4ac0ae9" providerId="LiveId" clId="{2BD3D7C0-2FD8-49BD-87B9-43617CBB1A57}" dt="2026-04-29T09:41:52.162" v="25" actId="478"/>
+          <ac:spMkLst>
+            <pc:docMk/>
+            <pc:sldMk cId="584521698" sldId="259"/>
+            <ac:spMk id="19" creationId="{6F6D0FC7-97E5-12CE-C4B9-4430D78CAFD9}"/>
+          </ac:spMkLst>
+        </pc:spChg>
+        <pc:spChg chg="add mod">
+          <ac:chgData name="poke 953" userId="c913613eb4ac0ae9" providerId="LiveId" clId="{2BD3D7C0-2FD8-49BD-87B9-43617CBB1A57}" dt="2026-04-29T09:43:32.106" v="35" actId="1076"/>
+          <ac:spMkLst>
+            <pc:docMk/>
+            <pc:sldMk cId="584521698" sldId="259"/>
+            <ac:spMk id="20" creationId="{850E2FF4-AC76-296E-47F2-550C8392A667}"/>
+          </ac:spMkLst>
+        </pc:spChg>
+        <pc:spChg chg="add mod">
+          <ac:chgData name="poke 953" userId="c913613eb4ac0ae9" providerId="LiveId" clId="{2BD3D7C0-2FD8-49BD-87B9-43617CBB1A57}" dt="2026-04-29T09:43:34.926" v="36" actId="1076"/>
+          <ac:spMkLst>
+            <pc:docMk/>
+            <pc:sldMk cId="584521698" sldId="259"/>
+            <ac:spMk id="21" creationId="{245B4CC3-E738-04DB-7225-32B0F7EF1EF6}"/>
+          </ac:spMkLst>
+        </pc:spChg>
+        <pc:spChg chg="add mod">
+          <ac:chgData name="poke 953" userId="c913613eb4ac0ae9" providerId="LiveId" clId="{2BD3D7C0-2FD8-49BD-87B9-43617CBB1A57}" dt="2026-04-29T10:03:29.235" v="63" actId="20577"/>
+          <ac:spMkLst>
+            <pc:docMk/>
+            <pc:sldMk cId="584521698" sldId="259"/>
+            <ac:spMk id="22" creationId="{12C4B4E8-870E-2B79-3995-EE74C2FEABB3}"/>
+          </ac:spMkLst>
+        </pc:spChg>
+        <pc:spChg chg="add mod">
+          <ac:chgData name="poke 953" userId="c913613eb4ac0ae9" providerId="LiveId" clId="{2BD3D7C0-2FD8-49BD-87B9-43617CBB1A57}" dt="2026-04-29T12:37:09.411" v="186" actId="20577"/>
+          <ac:spMkLst>
+            <pc:docMk/>
+            <pc:sldMk cId="584521698" sldId="259"/>
+            <ac:spMk id="23" creationId="{7F5F8F0C-A0B9-BFEC-51A7-2C1B6887DECE}"/>
+          </ac:spMkLst>
+        </pc:spChg>
+        <pc:spChg chg="del">
+          <ac:chgData name="poke 953" userId="c913613eb4ac0ae9" providerId="LiveId" clId="{2BD3D7C0-2FD8-49BD-87B9-43617CBB1A57}" dt="2026-04-26T13:36:13.439" v="2" actId="21"/>
+          <ac:spMkLst>
+            <pc:docMk/>
+            <pc:sldMk cId="584521698" sldId="259"/>
+            <ac:spMk id="33" creationId="{2ACC98AE-D923-DE8C-0194-8BCC926E274C}"/>
+          </ac:spMkLst>
+        </pc:spChg>
+        <pc:spChg chg="del">
+          <ac:chgData name="poke 953" userId="c913613eb4ac0ae9" providerId="LiveId" clId="{2BD3D7C0-2FD8-49BD-87B9-43617CBB1A57}" dt="2026-04-26T13:36:13.439" v="2" actId="21"/>
+          <ac:spMkLst>
+            <pc:docMk/>
+            <pc:sldMk cId="584521698" sldId="259"/>
+            <ac:spMk id="34" creationId="{5B7B574C-D2AC-8DED-F8F6-2939B03B0DA0}"/>
+          </ac:spMkLst>
+        </pc:spChg>
+        <pc:picChg chg="del mod modCrop">
+          <ac:chgData name="poke 953" userId="c913613eb4ac0ae9" providerId="LiveId" clId="{2BD3D7C0-2FD8-49BD-87B9-43617CBB1A57}" dt="2026-04-26T12:27:26.623" v="1" actId="478"/>
+          <ac:picMkLst>
+            <pc:docMk/>
+            <pc:sldMk cId="584521698" sldId="259"/>
+            <ac:picMk id="36" creationId="{BDB56CA7-4C8A-C4F0-C5BE-FF4383D0EC4B}"/>
+          </ac:picMkLst>
+        </pc:picChg>
+        <pc:cxnChg chg="add mod">
+          <ac:chgData name="poke 953" userId="c913613eb4ac0ae9" providerId="LiveId" clId="{2BD3D7C0-2FD8-49BD-87B9-43617CBB1A57}" dt="2026-04-29T09:41:48.046" v="24"/>
+          <ac:cxnSpMkLst>
+            <pc:docMk/>
+            <pc:sldMk cId="584521698" sldId="259"/>
+            <ac:cxnSpMk id="10" creationId="{AB3B2E47-A024-FA39-7A6E-FF80B364F151}"/>
+          </ac:cxnSpMkLst>
+        </pc:cxnChg>
+        <pc:cxnChg chg="add mod">
+          <ac:chgData name="poke 953" userId="c913613eb4ac0ae9" providerId="LiveId" clId="{2BD3D7C0-2FD8-49BD-87B9-43617CBB1A57}" dt="2026-04-29T09:41:48.046" v="24"/>
+          <ac:cxnSpMkLst>
+            <pc:docMk/>
+            <pc:sldMk cId="584521698" sldId="259"/>
+            <ac:cxnSpMk id="11" creationId="{52012F18-A58A-2372-655E-048AD8B6B3C3}"/>
+          </ac:cxnSpMkLst>
+        </pc:cxnChg>
+        <pc:cxnChg chg="add mod">
+          <ac:chgData name="poke 953" userId="c913613eb4ac0ae9" providerId="LiveId" clId="{2BD3D7C0-2FD8-49BD-87B9-43617CBB1A57}" dt="2026-04-29T09:41:48.046" v="24"/>
+          <ac:cxnSpMkLst>
+            <pc:docMk/>
+            <pc:sldMk cId="584521698" sldId="259"/>
+            <ac:cxnSpMk id="12" creationId="{8C5801F3-0339-E9E0-1BC9-E42058834BDC}"/>
+          </ac:cxnSpMkLst>
+        </pc:cxnChg>
+        <pc:cxnChg chg="add mod">
+          <ac:chgData name="poke 953" userId="c913613eb4ac0ae9" providerId="LiveId" clId="{2BD3D7C0-2FD8-49BD-87B9-43617CBB1A57}" dt="2026-04-29T09:41:48.046" v="24"/>
+          <ac:cxnSpMkLst>
+            <pc:docMk/>
+            <pc:sldMk cId="584521698" sldId="259"/>
+            <ac:cxnSpMk id="13" creationId="{3A1EC1F4-5993-D02F-EFDF-D51993B8F929}"/>
+          </ac:cxnSpMkLst>
+        </pc:cxnChg>
+        <pc:cxnChg chg="add mod">
+          <ac:chgData name="poke 953" userId="c913613eb4ac0ae9" providerId="LiveId" clId="{2BD3D7C0-2FD8-49BD-87B9-43617CBB1A57}" dt="2026-04-29T09:41:48.046" v="24"/>
+          <ac:cxnSpMkLst>
+            <pc:docMk/>
+            <pc:sldMk cId="584521698" sldId="259"/>
+            <ac:cxnSpMk id="14" creationId="{55BACE19-13FD-3E84-B3BC-0CAA9BB28879}"/>
+          </ac:cxnSpMkLst>
+        </pc:cxnChg>
+        <pc:cxnChg chg="add mod">
+          <ac:chgData name="poke 953" userId="c913613eb4ac0ae9" providerId="LiveId" clId="{2BD3D7C0-2FD8-49BD-87B9-43617CBB1A57}" dt="2026-04-29T09:42:32.805" v="28" actId="1076"/>
+          <ac:cxnSpMkLst>
+            <pc:docMk/>
+            <pc:sldMk cId="584521698" sldId="259"/>
+            <ac:cxnSpMk id="16" creationId="{90BF66BE-6807-60C0-BC27-9CAAF0345D43}"/>
+          </ac:cxnSpMkLst>
+        </pc:cxnChg>
+      </pc:sldChg>
+      <pc:sldChg chg="del">
+        <pc:chgData name="poke 953" userId="c913613eb4ac0ae9" providerId="LiveId" clId="{2BD3D7C0-2FD8-49BD-87B9-43617CBB1A57}" dt="2026-04-29T12:37:23.297" v="187" actId="2696"/>
+        <pc:sldMkLst>
+          <pc:docMk/>
+          <pc:sldMk cId="2328205133" sldId="263"/>
+        </pc:sldMkLst>
+      </pc:sldChg>
+      <pc:sldChg chg="modSp mod">
+        <pc:chgData name="poke 953" userId="c913613eb4ac0ae9" providerId="LiveId" clId="{2BD3D7C0-2FD8-49BD-87B9-43617CBB1A57}" dt="2026-04-29T12:37:44.556" v="189" actId="20577"/>
+        <pc:sldMkLst>
+          <pc:docMk/>
+          <pc:sldMk cId="1215615312" sldId="265"/>
+        </pc:sldMkLst>
+        <pc:spChg chg="mod">
+          <ac:chgData name="poke 953" userId="c913613eb4ac0ae9" providerId="LiveId" clId="{2BD3D7C0-2FD8-49BD-87B9-43617CBB1A57}" dt="2026-04-29T12:37:44.556" v="189" actId="20577"/>
+          <ac:spMkLst>
+            <pc:docMk/>
+            <pc:sldMk cId="1215615312" sldId="265"/>
+            <ac:spMk id="3" creationId="{D654BA91-BAEA-6714-9F84-0F10234AA0BD}"/>
+          </ac:spMkLst>
+        </pc:spChg>
+      </pc:sldChg>
+    </pc:docChg>
+  </pc:docChgLst>
   <pc:docChgLst>
     <pc:chgData name="poke 953" userId="c913613eb4ac0ae9" providerId="LiveId" clId="{A2D1C861-733C-41E4-9E6E-00A090B1F20A}"/>
     <pc:docChg chg="undo custSel addSld modSld sldOrd">
@@ -478,275 +747,6 @@
       </pc:sldChg>
     </pc:docChg>
   </pc:docChgLst>
-  <pc:docChgLst>
-    <pc:chgData name="poke 953" userId="c913613eb4ac0ae9" providerId="LiveId" clId="{2BD3D7C0-2FD8-49BD-87B9-43617CBB1A57}"/>
-    <pc:docChg chg="custSel delSld modSld">
-      <pc:chgData name="poke 953" userId="c913613eb4ac0ae9" providerId="LiveId" clId="{2BD3D7C0-2FD8-49BD-87B9-43617CBB1A57}" dt="2026-04-29T12:37:44.556" v="189" actId="20577"/>
-      <pc:docMkLst>
-        <pc:docMk/>
-      </pc:docMkLst>
-      <pc:sldChg chg="addSp delSp modSp mod">
-        <pc:chgData name="poke 953" userId="c913613eb4ac0ae9" providerId="LiveId" clId="{2BD3D7C0-2FD8-49BD-87B9-43617CBB1A57}" dt="2026-04-29T12:37:09.411" v="186" actId="20577"/>
-        <pc:sldMkLst>
-          <pc:docMk/>
-          <pc:sldMk cId="584521698" sldId="259"/>
-        </pc:sldMkLst>
-        <pc:spChg chg="add del mod">
-          <ac:chgData name="poke 953" userId="c913613eb4ac0ae9" providerId="LiveId" clId="{2BD3D7C0-2FD8-49BD-87B9-43617CBB1A57}" dt="2026-04-29T06:48:38.915" v="23" actId="478"/>
-          <ac:spMkLst>
-            <pc:docMk/>
-            <pc:sldMk cId="584521698" sldId="259"/>
-            <ac:spMk id="3" creationId="{3D826BD1-9B7B-3BCA-BE35-26EA3803BA39}"/>
-          </ac:spMkLst>
-        </pc:spChg>
-        <pc:spChg chg="add mod">
-          <ac:chgData name="poke 953" userId="c913613eb4ac0ae9" providerId="LiveId" clId="{2BD3D7C0-2FD8-49BD-87B9-43617CBB1A57}" dt="2026-04-29T09:41:48.046" v="24"/>
-          <ac:spMkLst>
-            <pc:docMk/>
-            <pc:sldMk cId="584521698" sldId="259"/>
-            <ac:spMk id="4" creationId="{FB61AF78-294F-5ADC-75CA-023A10110217}"/>
-          </ac:spMkLst>
-        </pc:spChg>
-        <pc:spChg chg="add mod">
-          <ac:chgData name="poke 953" userId="c913613eb4ac0ae9" providerId="LiveId" clId="{2BD3D7C0-2FD8-49BD-87B9-43617CBB1A57}" dt="2026-04-29T09:41:48.046" v="24"/>
-          <ac:spMkLst>
-            <pc:docMk/>
-            <pc:sldMk cId="584521698" sldId="259"/>
-            <ac:spMk id="5" creationId="{BB1ADA96-B725-BE34-E630-9D33E744B05D}"/>
-          </ac:spMkLst>
-        </pc:spChg>
-        <pc:spChg chg="add mod">
-          <ac:chgData name="poke 953" userId="c913613eb4ac0ae9" providerId="LiveId" clId="{2BD3D7C0-2FD8-49BD-87B9-43617CBB1A57}" dt="2026-04-29T09:41:48.046" v="24"/>
-          <ac:spMkLst>
-            <pc:docMk/>
-            <pc:sldMk cId="584521698" sldId="259"/>
-            <ac:spMk id="6" creationId="{A0142AEE-0C94-D858-7941-446787E7AEFC}"/>
-          </ac:spMkLst>
-        </pc:spChg>
-        <pc:spChg chg="add mod">
-          <ac:chgData name="poke 953" userId="c913613eb4ac0ae9" providerId="LiveId" clId="{2BD3D7C0-2FD8-49BD-87B9-43617CBB1A57}" dt="2026-04-29T09:41:48.046" v="24"/>
-          <ac:spMkLst>
-            <pc:docMk/>
-            <pc:sldMk cId="584521698" sldId="259"/>
-            <ac:spMk id="7" creationId="{73AD3AB8-5E12-3CB3-8868-C5B6BBFDA9C6}"/>
-          </ac:spMkLst>
-        </pc:spChg>
-        <pc:spChg chg="add mod">
-          <ac:chgData name="poke 953" userId="c913613eb4ac0ae9" providerId="LiveId" clId="{2BD3D7C0-2FD8-49BD-87B9-43617CBB1A57}" dt="2026-04-29T09:41:48.046" v="24"/>
-          <ac:spMkLst>
-            <pc:docMk/>
-            <pc:sldMk cId="584521698" sldId="259"/>
-            <ac:spMk id="8" creationId="{CAB10312-EDD1-1245-A148-89C5171DC268}"/>
-          </ac:spMkLst>
-        </pc:spChg>
-        <pc:spChg chg="add mod">
-          <ac:chgData name="poke 953" userId="c913613eb4ac0ae9" providerId="LiveId" clId="{2BD3D7C0-2FD8-49BD-87B9-43617CBB1A57}" dt="2026-04-29T09:41:48.046" v="24"/>
-          <ac:spMkLst>
-            <pc:docMk/>
-            <pc:sldMk cId="584521698" sldId="259"/>
-            <ac:spMk id="9" creationId="{8CFEDFC4-DF61-720D-28A9-0E4D4841C5F9}"/>
-          </ac:spMkLst>
-        </pc:spChg>
-        <pc:spChg chg="add del mod">
-          <ac:chgData name="poke 953" userId="c913613eb4ac0ae9" providerId="LiveId" clId="{2BD3D7C0-2FD8-49BD-87B9-43617CBB1A57}" dt="2026-04-29T09:41:52.162" v="25" actId="478"/>
-          <ac:spMkLst>
-            <pc:docMk/>
-            <pc:sldMk cId="584521698" sldId="259"/>
-            <ac:spMk id="15" creationId="{8F1FE9B9-8F10-3B15-6E52-ABB0813E0618}"/>
-          </ac:spMkLst>
-        </pc:spChg>
-        <pc:spChg chg="add del mod">
-          <ac:chgData name="poke 953" userId="c913613eb4ac0ae9" providerId="LiveId" clId="{2BD3D7C0-2FD8-49BD-87B9-43617CBB1A57}" dt="2026-04-29T09:41:52.162" v="25" actId="478"/>
-          <ac:spMkLst>
-            <pc:docMk/>
-            <pc:sldMk cId="584521698" sldId="259"/>
-            <ac:spMk id="17" creationId="{8C23E3C4-280F-CC1C-91C6-C9281D65EC19}"/>
-          </ac:spMkLst>
-        </pc:spChg>
-        <pc:spChg chg="add del mod">
-          <ac:chgData name="poke 953" userId="c913613eb4ac0ae9" providerId="LiveId" clId="{2BD3D7C0-2FD8-49BD-87B9-43617CBB1A57}" dt="2026-04-29T09:41:55.791" v="27" actId="478"/>
-          <ac:spMkLst>
-            <pc:docMk/>
-            <pc:sldMk cId="584521698" sldId="259"/>
-            <ac:spMk id="18" creationId="{5E276831-6B99-B87C-DB57-11631658E38D}"/>
-          </ac:spMkLst>
-        </pc:spChg>
-        <pc:spChg chg="add del mod">
-          <ac:chgData name="poke 953" userId="c913613eb4ac0ae9" providerId="LiveId" clId="{2BD3D7C0-2FD8-49BD-87B9-43617CBB1A57}" dt="2026-04-29T09:41:52.162" v="25" actId="478"/>
-          <ac:spMkLst>
-            <pc:docMk/>
-            <pc:sldMk cId="584521698" sldId="259"/>
-            <ac:spMk id="19" creationId="{6F6D0FC7-97E5-12CE-C4B9-4430D78CAFD9}"/>
-          </ac:spMkLst>
-        </pc:spChg>
-        <pc:spChg chg="add mod">
-          <ac:chgData name="poke 953" userId="c913613eb4ac0ae9" providerId="LiveId" clId="{2BD3D7C0-2FD8-49BD-87B9-43617CBB1A57}" dt="2026-04-29T09:43:32.106" v="35" actId="1076"/>
-          <ac:spMkLst>
-            <pc:docMk/>
-            <pc:sldMk cId="584521698" sldId="259"/>
-            <ac:spMk id="20" creationId="{850E2FF4-AC76-296E-47F2-550C8392A667}"/>
-          </ac:spMkLst>
-        </pc:spChg>
-        <pc:spChg chg="add mod">
-          <ac:chgData name="poke 953" userId="c913613eb4ac0ae9" providerId="LiveId" clId="{2BD3D7C0-2FD8-49BD-87B9-43617CBB1A57}" dt="2026-04-29T09:43:34.926" v="36" actId="1076"/>
-          <ac:spMkLst>
-            <pc:docMk/>
-            <pc:sldMk cId="584521698" sldId="259"/>
-            <ac:spMk id="21" creationId="{245B4CC3-E738-04DB-7225-32B0F7EF1EF6}"/>
-          </ac:spMkLst>
-        </pc:spChg>
-        <pc:spChg chg="add mod">
-          <ac:chgData name="poke 953" userId="c913613eb4ac0ae9" providerId="LiveId" clId="{2BD3D7C0-2FD8-49BD-87B9-43617CBB1A57}" dt="2026-04-29T10:03:29.235" v="63" actId="20577"/>
-          <ac:spMkLst>
-            <pc:docMk/>
-            <pc:sldMk cId="584521698" sldId="259"/>
-            <ac:spMk id="22" creationId="{12C4B4E8-870E-2B79-3995-EE74C2FEABB3}"/>
-          </ac:spMkLst>
-        </pc:spChg>
-        <pc:spChg chg="add mod">
-          <ac:chgData name="poke 953" userId="c913613eb4ac0ae9" providerId="LiveId" clId="{2BD3D7C0-2FD8-49BD-87B9-43617CBB1A57}" dt="2026-04-29T12:37:09.411" v="186" actId="20577"/>
-          <ac:spMkLst>
-            <pc:docMk/>
-            <pc:sldMk cId="584521698" sldId="259"/>
-            <ac:spMk id="23" creationId="{7F5F8F0C-A0B9-BFEC-51A7-2C1B6887DECE}"/>
-          </ac:spMkLst>
-        </pc:spChg>
-        <pc:spChg chg="del">
-          <ac:chgData name="poke 953" userId="c913613eb4ac0ae9" providerId="LiveId" clId="{2BD3D7C0-2FD8-49BD-87B9-43617CBB1A57}" dt="2026-04-26T13:36:13.439" v="2" actId="21"/>
-          <ac:spMkLst>
-            <pc:docMk/>
-            <pc:sldMk cId="584521698" sldId="259"/>
-            <ac:spMk id="33" creationId="{2ACC98AE-D923-DE8C-0194-8BCC926E274C}"/>
-          </ac:spMkLst>
-        </pc:spChg>
-        <pc:spChg chg="del">
-          <ac:chgData name="poke 953" userId="c913613eb4ac0ae9" providerId="LiveId" clId="{2BD3D7C0-2FD8-49BD-87B9-43617CBB1A57}" dt="2026-04-26T13:36:13.439" v="2" actId="21"/>
-          <ac:spMkLst>
-            <pc:docMk/>
-            <pc:sldMk cId="584521698" sldId="259"/>
-            <ac:spMk id="34" creationId="{5B7B574C-D2AC-8DED-F8F6-2939B03B0DA0}"/>
-          </ac:spMkLst>
-        </pc:spChg>
-        <pc:picChg chg="del mod modCrop">
-          <ac:chgData name="poke 953" userId="c913613eb4ac0ae9" providerId="LiveId" clId="{2BD3D7C0-2FD8-49BD-87B9-43617CBB1A57}" dt="2026-04-26T12:27:26.623" v="1" actId="478"/>
-          <ac:picMkLst>
-            <pc:docMk/>
-            <pc:sldMk cId="584521698" sldId="259"/>
-            <ac:picMk id="36" creationId="{BDB56CA7-4C8A-C4F0-C5BE-FF4383D0EC4B}"/>
-          </ac:picMkLst>
-        </pc:picChg>
-        <pc:cxnChg chg="add mod">
-          <ac:chgData name="poke 953" userId="c913613eb4ac0ae9" providerId="LiveId" clId="{2BD3D7C0-2FD8-49BD-87B9-43617CBB1A57}" dt="2026-04-29T09:41:48.046" v="24"/>
-          <ac:cxnSpMkLst>
-            <pc:docMk/>
-            <pc:sldMk cId="584521698" sldId="259"/>
-            <ac:cxnSpMk id="10" creationId="{AB3B2E47-A024-FA39-7A6E-FF80B364F151}"/>
-          </ac:cxnSpMkLst>
-        </pc:cxnChg>
-        <pc:cxnChg chg="add mod">
-          <ac:chgData name="poke 953" userId="c913613eb4ac0ae9" providerId="LiveId" clId="{2BD3D7C0-2FD8-49BD-87B9-43617CBB1A57}" dt="2026-04-29T09:41:48.046" v="24"/>
-          <ac:cxnSpMkLst>
-            <pc:docMk/>
-            <pc:sldMk cId="584521698" sldId="259"/>
-            <ac:cxnSpMk id="11" creationId="{52012F18-A58A-2372-655E-048AD8B6B3C3}"/>
-          </ac:cxnSpMkLst>
-        </pc:cxnChg>
-        <pc:cxnChg chg="add mod">
-          <ac:chgData name="poke 953" userId="c913613eb4ac0ae9" providerId="LiveId" clId="{2BD3D7C0-2FD8-49BD-87B9-43617CBB1A57}" dt="2026-04-29T09:41:48.046" v="24"/>
-          <ac:cxnSpMkLst>
-            <pc:docMk/>
-            <pc:sldMk cId="584521698" sldId="259"/>
-            <ac:cxnSpMk id="12" creationId="{8C5801F3-0339-E9E0-1BC9-E42058834BDC}"/>
-          </ac:cxnSpMkLst>
-        </pc:cxnChg>
-        <pc:cxnChg chg="add mod">
-          <ac:chgData name="poke 953" userId="c913613eb4ac0ae9" providerId="LiveId" clId="{2BD3D7C0-2FD8-49BD-87B9-43617CBB1A57}" dt="2026-04-29T09:41:48.046" v="24"/>
-          <ac:cxnSpMkLst>
-            <pc:docMk/>
-            <pc:sldMk cId="584521698" sldId="259"/>
-            <ac:cxnSpMk id="13" creationId="{3A1EC1F4-5993-D02F-EFDF-D51993B8F929}"/>
-          </ac:cxnSpMkLst>
-        </pc:cxnChg>
-        <pc:cxnChg chg="add mod">
-          <ac:chgData name="poke 953" userId="c913613eb4ac0ae9" providerId="LiveId" clId="{2BD3D7C0-2FD8-49BD-87B9-43617CBB1A57}" dt="2026-04-29T09:41:48.046" v="24"/>
-          <ac:cxnSpMkLst>
-            <pc:docMk/>
-            <pc:sldMk cId="584521698" sldId="259"/>
-            <ac:cxnSpMk id="14" creationId="{55BACE19-13FD-3E84-B3BC-0CAA9BB28879}"/>
-          </ac:cxnSpMkLst>
-        </pc:cxnChg>
-        <pc:cxnChg chg="add mod">
-          <ac:chgData name="poke 953" userId="c913613eb4ac0ae9" providerId="LiveId" clId="{2BD3D7C0-2FD8-49BD-87B9-43617CBB1A57}" dt="2026-04-29T09:42:32.805" v="28" actId="1076"/>
-          <ac:cxnSpMkLst>
-            <pc:docMk/>
-            <pc:sldMk cId="584521698" sldId="259"/>
-            <ac:cxnSpMk id="16" creationId="{90BF66BE-6807-60C0-BC27-9CAAF0345D43}"/>
-          </ac:cxnSpMkLst>
-        </pc:cxnChg>
-      </pc:sldChg>
-      <pc:sldChg chg="del">
-        <pc:chgData name="poke 953" userId="c913613eb4ac0ae9" providerId="LiveId" clId="{2BD3D7C0-2FD8-49BD-87B9-43617CBB1A57}" dt="2026-04-29T12:37:23.297" v="187" actId="2696"/>
-        <pc:sldMkLst>
-          <pc:docMk/>
-          <pc:sldMk cId="2328205133" sldId="263"/>
-        </pc:sldMkLst>
-      </pc:sldChg>
-      <pc:sldChg chg="modSp mod">
-        <pc:chgData name="poke 953" userId="c913613eb4ac0ae9" providerId="LiveId" clId="{2BD3D7C0-2FD8-49BD-87B9-43617CBB1A57}" dt="2026-04-29T12:37:44.556" v="189" actId="20577"/>
-        <pc:sldMkLst>
-          <pc:docMk/>
-          <pc:sldMk cId="1215615312" sldId="265"/>
-        </pc:sldMkLst>
-        <pc:spChg chg="mod">
-          <ac:chgData name="poke 953" userId="c913613eb4ac0ae9" providerId="LiveId" clId="{2BD3D7C0-2FD8-49BD-87B9-43617CBB1A57}" dt="2026-04-29T12:37:44.556" v="189" actId="20577"/>
-          <ac:spMkLst>
-            <pc:docMk/>
-            <pc:sldMk cId="1215615312" sldId="265"/>
-            <ac:spMk id="3" creationId="{D654BA91-BAEA-6714-9F84-0F10234AA0BD}"/>
-          </ac:spMkLst>
-        </pc:spChg>
-      </pc:sldChg>
-    </pc:docChg>
-  </pc:docChgLst>
-  <pc:docChgLst>
-    <pc:chgData name="Utilisateur invité" providerId="Windows Live" clId="Web-{7DF10C54-B4CE-12F0-0B1A-E95F9FB99A4A}"/>
-    <pc:docChg chg="delSld modSld">
-      <pc:chgData name="Utilisateur invité" userId="" providerId="Windows Live" clId="Web-{7DF10C54-B4CE-12F0-0B1A-E95F9FB99A4A}" dt="2026-01-28T08:29:23.553" v="20" actId="14100"/>
-      <pc:docMkLst>
-        <pc:docMk/>
-      </pc:docMkLst>
-      <pc:sldChg chg="del">
-        <pc:chgData name="Utilisateur invité" userId="" providerId="Windows Live" clId="Web-{7DF10C54-B4CE-12F0-0B1A-E95F9FB99A4A}" dt="2026-01-28T08:28:32.474" v="0"/>
-        <pc:sldMkLst>
-          <pc:docMk/>
-          <pc:sldMk cId="621877034" sldId="258"/>
-        </pc:sldMkLst>
-      </pc:sldChg>
-      <pc:sldChg chg="addSp modSp">
-        <pc:chgData name="Utilisateur invité" userId="" providerId="Windows Live" clId="Web-{7DF10C54-B4CE-12F0-0B1A-E95F9FB99A4A}" dt="2026-01-28T08:29:23.553" v="20" actId="14100"/>
-        <pc:sldMkLst>
-          <pc:docMk/>
-          <pc:sldMk cId="584521698" sldId="259"/>
-        </pc:sldMkLst>
-        <pc:spChg chg="add mod">
-          <ac:chgData name="Utilisateur invité" userId="" providerId="Windows Live" clId="Web-{7DF10C54-B4CE-12F0-0B1A-E95F9FB99A4A}" dt="2026-01-28T08:29:03.005" v="2" actId="14100"/>
-          <ac:spMkLst>
-            <pc:docMk/>
-            <pc:sldMk cId="584521698" sldId="259"/>
-            <ac:spMk id="10" creationId="{EF873B9A-616D-5CC7-3334-ABE8D8D3C3D6}"/>
-          </ac:spMkLst>
-        </pc:spChg>
-        <pc:spChg chg="add mod">
-          <ac:chgData name="Utilisateur invité" userId="" providerId="Windows Live" clId="Web-{7DF10C54-B4CE-12F0-0B1A-E95F9FB99A4A}" dt="2026-01-28T08:29:23.553" v="20" actId="14100"/>
-          <ac:spMkLst>
-            <pc:docMk/>
-            <pc:sldMk cId="584521698" sldId="259"/>
-            <ac:spMk id="18" creationId="{FD9642DC-D4D8-B585-769F-8801AFD83B7D}"/>
-          </ac:spMkLst>
-        </pc:spChg>
-      </pc:sldChg>
-    </pc:docChg>
-  </pc:docChgLst>
 </pc:chgInfo>
 </file>
 
@@ -832,7 +832,7 @@
           <a:p>
             <a:fld id="{D0984811-7D92-41F6-B58D-401860CE2567}" type="datetimeFigureOut">
               <a:rPr lang="fr-FR" smtClean="0"/>
-              <a:t>29/04/2026</a:t>
+              <a:t>30/04/2026</a:t>
             </a:fld>
             <a:endParaRPr lang="fr-FR"/>
           </a:p>
@@ -1417,7 +1417,7 @@
           <a:p>
             <a:fld id="{C128FA71-3A18-48C0-980F-4B68F7F63042}" type="datetime1">
               <a:rPr lang="en-US" smtClean="0"/>
-              <a:t>4/29/2026</a:t>
+              <a:t>4/30/2026</a:t>
             </a:fld>
             <a:endParaRPr lang="en-US"/>
           </a:p>
@@ -1625,7 +1625,7 @@
           <a:p>
             <a:fld id="{7104EDB3-C0E8-45F8-9E1D-1B6C8D1880C0}" type="datetime1">
               <a:rPr lang="en-US" smtClean="0"/>
-              <a:t>4/29/2026</a:t>
+              <a:t>4/30/2026</a:t>
             </a:fld>
             <a:endParaRPr lang="en-US"/>
           </a:p>
@@ -1833,7 +1833,7 @@
           <a:p>
             <a:fld id="{9CF0EC4B-54ED-4041-B552-9BA760FA3DBA}" type="datetime1">
               <a:rPr lang="en-US" smtClean="0"/>
-              <a:t>4/29/2026</a:t>
+              <a:t>4/30/2026</a:t>
             </a:fld>
             <a:endParaRPr lang="en-US"/>
           </a:p>
@@ -2031,7 +2031,7 @@
           <a:p>
             <a:fld id="{51C1210E-201E-4473-82AC-2466F5386C38}" type="datetime1">
               <a:rPr lang="en-US" smtClean="0"/>
-              <a:t>4/29/2026</a:t>
+              <a:t>4/30/2026</a:t>
             </a:fld>
             <a:endParaRPr lang="en-US"/>
           </a:p>
@@ -2308,7 +2308,7 @@
           <a:p>
             <a:fld id="{B01EA198-6CAB-4B8F-B93F-1F9C8C4B6CE7}" type="datetime1">
               <a:rPr lang="en-US" smtClean="0"/>
-              <a:t>4/29/2026</a:t>
+              <a:t>4/30/2026</a:t>
             </a:fld>
             <a:endParaRPr lang="en-US"/>
           </a:p>
@@ -2578,7 +2578,7 @@
           <a:p>
             <a:fld id="{CA06041F-4525-44D5-AA4F-332294BF1F56}" type="datetime1">
               <a:rPr lang="en-US" smtClean="0"/>
-              <a:t>4/29/2026</a:t>
+              <a:t>4/30/2026</a:t>
             </a:fld>
             <a:endParaRPr lang="en-US"/>
           </a:p>
@@ -3000,7 +3000,7 @@
           <a:p>
             <a:fld id="{F9557091-BBDF-4EB9-BA6B-2BB67AC4FC0F}" type="datetime1">
               <a:rPr lang="en-US" smtClean="0"/>
-              <a:t>4/29/2026</a:t>
+              <a:t>4/30/2026</a:t>
             </a:fld>
             <a:endParaRPr lang="en-US"/>
           </a:p>
@@ -3141,7 +3141,7 @@
           <a:p>
             <a:fld id="{2D6B226B-77A6-410C-9796-083F278E0125}" type="datetime1">
               <a:rPr lang="en-US" smtClean="0"/>
-              <a:t>4/29/2026</a:t>
+              <a:t>4/30/2026</a:t>
             </a:fld>
             <a:endParaRPr lang="en-US"/>
           </a:p>
@@ -3254,7 +3254,7 @@
           <a:p>
             <a:fld id="{A23A578B-D289-4C40-8593-3D356C49DA58}" type="datetime1">
               <a:rPr lang="en-US" smtClean="0"/>
-              <a:t>4/29/2026</a:t>
+              <a:t>4/30/2026</a:t>
             </a:fld>
             <a:endParaRPr lang="en-US"/>
           </a:p>
@@ -3571,7 +3571,7 @@
           <a:p>
             <a:fld id="{713DFAE3-14DB-48A7-A80F-80DDB072CE3D}" type="datetime1">
               <a:rPr lang="en-US" smtClean="0"/>
-              <a:t>4/29/2026</a:t>
+              <a:t>4/30/2026</a:t>
             </a:fld>
             <a:endParaRPr lang="en-US"/>
           </a:p>
@@ -3864,7 +3864,7 @@
           <a:p>
             <a:fld id="{92C5EAEF-6478-4102-8F5D-A5FE9FC97ACB}" type="datetime1">
               <a:rPr lang="en-US" smtClean="0"/>
-              <a:t>4/29/2026</a:t>
+              <a:t>4/30/2026</a:t>
             </a:fld>
             <a:endParaRPr lang="en-US"/>
           </a:p>
@@ -4103,7 +4103,7 @@
           <a:p>
             <a:fld id="{67F45AC6-C491-4585-A584-9CE2AF7D5500}" type="datetime1">
               <a:rPr lang="en-US" smtClean="0"/>
-              <a:t>4/29/2026</a:t>
+              <a:t>4/30/2026</a:t>
             </a:fld>
             <a:endParaRPr lang="en-US"/>
           </a:p>
@@ -5743,6 +5743,52 @@
               <a:rPr lang="fr-FR" dirty="0"/>
               <a:t>Un apprentie </a:t>
             </a:r>
+          </a:p>
+        </p:txBody>
+      </p:sp>
+      <p:sp>
+        <p:nvSpPr>
+          <p:cNvPr id="3" name="Flèche : droite 2">
+            <a:extLst>
+              <a:ext uri="{FF2B5EF4-FFF2-40B4-BE49-F238E27FC236}">
+                <a16:creationId xmlns:a16="http://schemas.microsoft.com/office/drawing/2014/main" id="{567AF608-87C8-D315-D5B0-029CAAFCFF47}"/>
+              </a:ext>
+            </a:extLst>
+          </p:cNvPr>
+          <p:cNvSpPr/>
+          <p:nvPr/>
+        </p:nvSpPr>
+        <p:spPr>
+          <a:xfrm rot="10800000">
+            <a:off x="5444591" y="4399298"/>
+            <a:ext cx="1302818" cy="779905"/>
+          </a:xfrm>
+          <a:prstGeom prst="rightArrow">
+            <a:avLst/>
+          </a:prstGeom>
+        </p:spPr>
+        <p:style>
+          <a:lnRef idx="2">
+            <a:schemeClr val="accent1">
+              <a:shade val="15000"/>
+            </a:schemeClr>
+          </a:lnRef>
+          <a:fillRef idx="1">
+            <a:schemeClr val="accent1"/>
+          </a:fillRef>
+          <a:effectRef idx="0">
+            <a:schemeClr val="accent1"/>
+          </a:effectRef>
+          <a:fontRef idx="minor">
+            <a:schemeClr val="lt1"/>
+          </a:fontRef>
+        </p:style>
+        <p:txBody>
+          <a:bodyPr rtlCol="0" anchor="ctr"/>
+          <a:lstStyle/>
+          <a:p>
+            <a:pPr algn="ctr"/>
+            <a:endParaRPr lang="fr-FR"/>
           </a:p>
         </p:txBody>
       </p:sp>

--- a/Presentation stage 2ème année.pptx
+++ b/Presentation stage 2ème année.pptx
@@ -5,7 +5,7 @@
     <p:sldMasterId id="2147483660" r:id="rId1"/>
   </p:sldMasterIdLst>
   <p:notesMasterIdLst>
-    <p:notesMasterId r:id="rId8"/>
+    <p:notesMasterId r:id="rId7"/>
   </p:notesMasterIdLst>
   <p:sldIdLst>
     <p:sldId id="256" r:id="rId2"/>
@@ -13,7 +13,6 @@
     <p:sldId id="259" r:id="rId4"/>
     <p:sldId id="264" r:id="rId5"/>
     <p:sldId id="265" r:id="rId6"/>
-    <p:sldId id="261" r:id="rId7"/>
   </p:sldIdLst>
   <p:sldSz cx="12192000" cy="6858000"/>
   <p:notesSz cx="6858000" cy="9144000"/>
@@ -832,7 +831,7 @@
           <a:p>
             <a:fld id="{D0984811-7D92-41F6-B58D-401860CE2567}" type="datetimeFigureOut">
               <a:rPr lang="fr-FR" smtClean="0"/>
-              <a:t>30/04/2026</a:t>
+              <a:t>01/05/2026</a:t>
             </a:fld>
             <a:endParaRPr lang="fr-FR"/>
           </a:p>
@@ -1266,6 +1265,141 @@
 </p:notes>
 </file>
 
+<file path=ppt/notesSlides/notesSlide2.xml><?xml version="1.0" encoding="utf-8"?>
+<p:notes xmlns:a="http://schemas.openxmlformats.org/drawingml/2006/main" xmlns:r="http://schemas.openxmlformats.org/officeDocument/2006/relationships" xmlns:p="http://schemas.openxmlformats.org/presentationml/2006/main">
+  <p:cSld>
+    <p:spTree>
+      <p:nvGrpSpPr>
+        <p:cNvPr id="1" name=""/>
+        <p:cNvGrpSpPr/>
+        <p:nvPr/>
+      </p:nvGrpSpPr>
+      <p:grpSpPr>
+        <a:xfrm>
+          <a:off x="0" y="0"/>
+          <a:ext cx="0" cy="0"/>
+          <a:chOff x="0" y="0"/>
+          <a:chExt cx="0" cy="0"/>
+        </a:xfrm>
+      </p:grpSpPr>
+      <p:sp>
+        <p:nvSpPr>
+          <p:cNvPr id="2" name="Espace réservé de l'image des diapositives 1"/>
+          <p:cNvSpPr>
+            <a:spLocks noGrp="1" noRot="1" noChangeAspect="1"/>
+          </p:cNvSpPr>
+          <p:nvPr>
+            <p:ph type="sldImg"/>
+          </p:nvPr>
+        </p:nvSpPr>
+        <p:spPr/>
+      </p:sp>
+      <p:sp>
+        <p:nvSpPr>
+          <p:cNvPr id="3" name="Espace réservé des notes 2"/>
+          <p:cNvSpPr>
+            <a:spLocks noGrp="1"/>
+          </p:cNvSpPr>
+          <p:nvPr>
+            <p:ph type="body" idx="1"/>
+          </p:nvPr>
+        </p:nvSpPr>
+        <p:spPr/>
+        <p:txBody>
+          <a:bodyPr/>
+          <a:lstStyle/>
+          <a:p>
+            <a:r>
+              <a:rPr lang="fr-FR" dirty="0"/>
+              <a:t>Qu'est-ce que j'ai fait durant mon stage?</a:t>
+            </a:r>
+          </a:p>
+          <a:p>
+            <a:r>
+              <a:rPr lang="fr-FR" dirty="0"/>
+              <a:t>2 jours à l'entreprise et 3 jours en télétravail</a:t>
+            </a:r>
+          </a:p>
+          <a:p>
+            <a:r>
+              <a:rPr lang="fr-FR" dirty="0"/>
+              <a:t>Manipulation de données brutes, leurs nettoyage et leurs transformations avec informatica</a:t>
+            </a:r>
+          </a:p>
+          <a:p>
+            <a:r>
+              <a:rPr lang="fr-FR" dirty="0"/>
+              <a:t>Interrogation des données avec </a:t>
+            </a:r>
+            <a:r>
+              <a:rPr lang="fr-FR" dirty="0" err="1"/>
+              <a:t>snowflack</a:t>
+            </a:r>
+            <a:endParaRPr lang="fr-FR" dirty="0"/>
+          </a:p>
+          <a:p>
+            <a:r>
+              <a:rPr lang="fr-FR" dirty="0"/>
+              <a:t>Tri de base de données et vérification de celle-ci </a:t>
+            </a:r>
+            <a:r>
+              <a:rPr lang="fr-FR" dirty="0">
+                <a:sym typeface="Wingdings" panose="05000000000000000000" pitchFamily="2" charset="2"/>
+              </a:rPr>
+              <a:t></a:t>
+            </a:r>
+            <a:r>
+              <a:rPr lang="fr-FR" dirty="0" err="1">
+                <a:sym typeface="Wingdings" panose="05000000000000000000" pitchFamily="2" charset="2"/>
+              </a:rPr>
+              <a:t>snowflake</a:t>
+            </a:r>
+            <a:endParaRPr lang="fr-FR" dirty="0"/>
+          </a:p>
+          <a:p>
+            <a:endParaRPr lang="fr-FR" dirty="0"/>
+          </a:p>
+          <a:p>
+            <a:endParaRPr lang="fr-FR" dirty="0"/>
+          </a:p>
+        </p:txBody>
+      </p:sp>
+      <p:sp>
+        <p:nvSpPr>
+          <p:cNvPr id="4" name="Espace réservé du numéro de diapositive 3"/>
+          <p:cNvSpPr>
+            <a:spLocks noGrp="1"/>
+          </p:cNvSpPr>
+          <p:nvPr>
+            <p:ph type="sldNum" sz="quarter" idx="5"/>
+          </p:nvPr>
+        </p:nvSpPr>
+        <p:spPr/>
+        <p:txBody>
+          <a:bodyPr/>
+          <a:lstStyle/>
+          <a:p>
+            <a:fld id="{D5985EDB-9CB5-4924-892C-CEAA459BBE1E}" type="slidenum">
+              <a:rPr lang="fr-FR" smtClean="0"/>
+              <a:t>5</a:t>
+            </a:fld>
+            <a:endParaRPr lang="fr-FR"/>
+          </a:p>
+        </p:txBody>
+      </p:sp>
+    </p:spTree>
+    <p:extLst>
+      <p:ext uri="{BB962C8B-B14F-4D97-AF65-F5344CB8AC3E}">
+        <p14:creationId xmlns:p14="http://schemas.microsoft.com/office/powerpoint/2010/main" val="2703424410"/>
+      </p:ext>
+    </p:extLst>
+  </p:cSld>
+  <p:clrMapOvr>
+    <a:masterClrMapping/>
+  </p:clrMapOvr>
+</p:notes>
+</file>
+
 <file path=ppt/slideLayouts/slideLayout1.xml><?xml version="1.0" encoding="utf-8"?>
 <p:sldLayout xmlns:a="http://schemas.openxmlformats.org/drawingml/2006/main" xmlns:r="http://schemas.openxmlformats.org/officeDocument/2006/relationships" xmlns:p="http://schemas.openxmlformats.org/presentationml/2006/main" type="title" preserve="1">
   <p:cSld name="Title Slide">
@@ -1417,7 +1551,7 @@
           <a:p>
             <a:fld id="{C128FA71-3A18-48C0-980F-4B68F7F63042}" type="datetime1">
               <a:rPr lang="en-US" smtClean="0"/>
-              <a:t>4/30/2026</a:t>
+              <a:t>5/1/2026</a:t>
             </a:fld>
             <a:endParaRPr lang="en-US"/>
           </a:p>
@@ -1625,7 +1759,7 @@
           <a:p>
             <a:fld id="{7104EDB3-C0E8-45F8-9E1D-1B6C8D1880C0}" type="datetime1">
               <a:rPr lang="en-US" smtClean="0"/>
-              <a:t>4/30/2026</a:t>
+              <a:t>5/1/2026</a:t>
             </a:fld>
             <a:endParaRPr lang="en-US"/>
           </a:p>
@@ -1833,7 +1967,7 @@
           <a:p>
             <a:fld id="{9CF0EC4B-54ED-4041-B552-9BA760FA3DBA}" type="datetime1">
               <a:rPr lang="en-US" smtClean="0"/>
-              <a:t>4/30/2026</a:t>
+              <a:t>5/1/2026</a:t>
             </a:fld>
             <a:endParaRPr lang="en-US"/>
           </a:p>
@@ -2031,7 +2165,7 @@
           <a:p>
             <a:fld id="{51C1210E-201E-4473-82AC-2466F5386C38}" type="datetime1">
               <a:rPr lang="en-US" smtClean="0"/>
-              <a:t>4/30/2026</a:t>
+              <a:t>5/1/2026</a:t>
             </a:fld>
             <a:endParaRPr lang="en-US"/>
           </a:p>
@@ -2308,7 +2442,7 @@
           <a:p>
             <a:fld id="{B01EA198-6CAB-4B8F-B93F-1F9C8C4B6CE7}" type="datetime1">
               <a:rPr lang="en-US" smtClean="0"/>
-              <a:t>4/30/2026</a:t>
+              <a:t>5/1/2026</a:t>
             </a:fld>
             <a:endParaRPr lang="en-US"/>
           </a:p>
@@ -2578,7 +2712,7 @@
           <a:p>
             <a:fld id="{CA06041F-4525-44D5-AA4F-332294BF1F56}" type="datetime1">
               <a:rPr lang="en-US" smtClean="0"/>
-              <a:t>4/30/2026</a:t>
+              <a:t>5/1/2026</a:t>
             </a:fld>
             <a:endParaRPr lang="en-US"/>
           </a:p>
@@ -3000,7 +3134,7 @@
           <a:p>
             <a:fld id="{F9557091-BBDF-4EB9-BA6B-2BB67AC4FC0F}" type="datetime1">
               <a:rPr lang="en-US" smtClean="0"/>
-              <a:t>4/30/2026</a:t>
+              <a:t>5/1/2026</a:t>
             </a:fld>
             <a:endParaRPr lang="en-US"/>
           </a:p>
@@ -3141,7 +3275,7 @@
           <a:p>
             <a:fld id="{2D6B226B-77A6-410C-9796-083F278E0125}" type="datetime1">
               <a:rPr lang="en-US" smtClean="0"/>
-              <a:t>4/30/2026</a:t>
+              <a:t>5/1/2026</a:t>
             </a:fld>
             <a:endParaRPr lang="en-US"/>
           </a:p>
@@ -3254,7 +3388,7 @@
           <a:p>
             <a:fld id="{A23A578B-D289-4C40-8593-3D356C49DA58}" type="datetime1">
               <a:rPr lang="en-US" smtClean="0"/>
-              <a:t>4/30/2026</a:t>
+              <a:t>5/1/2026</a:t>
             </a:fld>
             <a:endParaRPr lang="en-US"/>
           </a:p>
@@ -3571,7 +3705,7 @@
           <a:p>
             <a:fld id="{713DFAE3-14DB-48A7-A80F-80DDB072CE3D}" type="datetime1">
               <a:rPr lang="en-US" smtClean="0"/>
-              <a:t>4/30/2026</a:t>
+              <a:t>5/1/2026</a:t>
             </a:fld>
             <a:endParaRPr lang="en-US"/>
           </a:p>
@@ -3864,7 +3998,7 @@
           <a:p>
             <a:fld id="{92C5EAEF-6478-4102-8F5D-A5FE9FC97ACB}" type="datetime1">
               <a:rPr lang="en-US" smtClean="0"/>
-              <a:t>4/30/2026</a:t>
+              <a:t>5/1/2026</a:t>
             </a:fld>
             <a:endParaRPr lang="en-US"/>
           </a:p>
@@ -4103,7 +4237,7 @@
           <a:p>
             <a:fld id="{67F45AC6-C491-4585-A584-9CE2AF7D5500}" type="datetime1">
               <a:rPr lang="en-US" smtClean="0"/>
-              <a:t>4/30/2026</a:t>
+              <a:t>5/1/2026</a:t>
             </a:fld>
             <a:endParaRPr lang="en-US"/>
           </a:p>
@@ -5550,7 +5684,7 @@
         </p:nvSpPr>
         <p:spPr>
           <a:xfrm flipH="1">
-            <a:off x="2436440" y="4332512"/>
+            <a:off x="2418490" y="4466086"/>
             <a:ext cx="940209" cy="779905"/>
           </a:xfrm>
           <a:prstGeom prst="rightArrow">
@@ -5748,10 +5882,10 @@
       </p:sp>
       <p:sp>
         <p:nvSpPr>
-          <p:cNvPr id="3" name="Flèche : droite 2">
-            <a:extLst>
-              <a:ext uri="{FF2B5EF4-FFF2-40B4-BE49-F238E27FC236}">
-                <a16:creationId xmlns:a16="http://schemas.microsoft.com/office/drawing/2014/main" id="{567AF608-87C8-D315-D5B0-029CAAFCFF47}"/>
+          <p:cNvPr id="18" name="Flèche : droite 17">
+            <a:extLst>
+              <a:ext uri="{FF2B5EF4-FFF2-40B4-BE49-F238E27FC236}">
+                <a16:creationId xmlns:a16="http://schemas.microsoft.com/office/drawing/2014/main" id="{79AC3E78-E6B5-E37F-7B06-589B9DD1470F}"/>
               </a:ext>
             </a:extLst>
           </p:cNvPr>
@@ -5759,9 +5893,9 @@
           <p:nvPr/>
         </p:nvSpPr>
         <p:spPr>
-          <a:xfrm rot="10800000">
-            <a:off x="5444591" y="4399298"/>
-            <a:ext cx="1302818" cy="779905"/>
+          <a:xfrm>
+            <a:off x="5372676" y="4441839"/>
+            <a:ext cx="1602223" cy="646331"/>
           </a:xfrm>
           <a:prstGeom prst="rightArrow">
             <a:avLst/>
@@ -6021,130 +6155,6 @@
     <p:extLst>
       <p:ext uri="{BB962C8B-B14F-4D97-AF65-F5344CB8AC3E}">
         <p14:creationId xmlns:p14="http://schemas.microsoft.com/office/powerpoint/2010/main" val="1215615312"/>
-      </p:ext>
-    </p:extLst>
-  </p:cSld>
-  <p:clrMapOvr>
-    <a:masterClrMapping/>
-  </p:clrMapOvr>
-</p:sld>
-</file>
-
-<file path=ppt/slides/slide6.xml><?xml version="1.0" encoding="utf-8"?>
-<p:sld xmlns:a="http://schemas.openxmlformats.org/drawingml/2006/main" xmlns:r="http://schemas.openxmlformats.org/officeDocument/2006/relationships" xmlns:p="http://schemas.openxmlformats.org/presentationml/2006/main">
-  <p:cSld>
-    <p:spTree>
-      <p:nvGrpSpPr>
-        <p:cNvPr id="1" name=""/>
-        <p:cNvGrpSpPr/>
-        <p:nvPr/>
-      </p:nvGrpSpPr>
-      <p:grpSpPr>
-        <a:xfrm>
-          <a:off x="0" y="0"/>
-          <a:ext cx="0" cy="0"/>
-          <a:chOff x="0" y="0"/>
-          <a:chExt cx="0" cy="0"/>
-        </a:xfrm>
-      </p:grpSpPr>
-      <p:sp>
-        <p:nvSpPr>
-          <p:cNvPr id="2" name="Titre 1">
-            <a:extLst>
-              <a:ext uri="{FF2B5EF4-FFF2-40B4-BE49-F238E27FC236}">
-                <a16:creationId xmlns:a16="http://schemas.microsoft.com/office/drawing/2014/main" id="{5D39E20B-EE24-1DBB-C4FB-ABE45F7FCF8E}"/>
-              </a:ext>
-            </a:extLst>
-          </p:cNvPr>
-          <p:cNvSpPr>
-            <a:spLocks noGrp="1"/>
-          </p:cNvSpPr>
-          <p:nvPr>
-            <p:ph type="title"/>
-          </p:nvPr>
-        </p:nvSpPr>
-        <p:spPr/>
-        <p:txBody>
-          <a:bodyPr/>
-          <a:lstStyle/>
-          <a:p>
-            <a:r>
-              <a:rPr lang="fr-FR"/>
-              <a:t>Qu'est-ce que j'ai fait durant mon stage?</a:t>
-            </a:r>
-          </a:p>
-        </p:txBody>
-      </p:sp>
-      <p:sp>
-        <p:nvSpPr>
-          <p:cNvPr id="3" name="Espace réservé du contenu 2">
-            <a:extLst>
-              <a:ext uri="{FF2B5EF4-FFF2-40B4-BE49-F238E27FC236}">
-                <a16:creationId xmlns:a16="http://schemas.microsoft.com/office/drawing/2014/main" id="{D654BA91-BAEA-6714-9F84-0F10234AA0BD}"/>
-              </a:ext>
-            </a:extLst>
-          </p:cNvPr>
-          <p:cNvSpPr>
-            <a:spLocks noGrp="1"/>
-          </p:cNvSpPr>
-          <p:nvPr>
-            <p:ph idx="1"/>
-          </p:nvPr>
-        </p:nvSpPr>
-        <p:spPr>
-          <a:xfrm>
-            <a:off x="612647" y="1699320"/>
-            <a:ext cx="11350727" cy="4610040"/>
-          </a:xfrm>
-        </p:spPr>
-        <p:txBody>
-          <a:bodyPr vert="horz" lIns="91440" tIns="45720" rIns="91440" bIns="45720" rtlCol="0" anchor="t">
-            <a:normAutofit/>
-          </a:bodyPr>
-          <a:lstStyle/>
-          <a:p>
-            <a:r>
-              <a:rPr lang="fr-FR" dirty="0"/>
-              <a:t>2 jours à l'entreprise et 3 jours en télétravail</a:t>
-            </a:r>
-          </a:p>
-          <a:p>
-            <a:r>
-              <a:rPr lang="fr-FR" dirty="0"/>
-              <a:t>Manipulation de données brutes, leurs nettoyage et leurs transformations avec informatica</a:t>
-            </a:r>
-          </a:p>
-          <a:p>
-            <a:r>
-              <a:rPr lang="fr-FR" dirty="0"/>
-              <a:t>Interrogation des données avec snowflack</a:t>
-            </a:r>
-          </a:p>
-          <a:p>
-            <a:r>
-              <a:rPr lang="fr-FR" dirty="0"/>
-              <a:t>Tri de base de données et vérification de celle-ci </a:t>
-            </a:r>
-            <a:r>
-              <a:rPr lang="fr-FR" dirty="0">
-                <a:sym typeface="Wingdings" panose="05000000000000000000" pitchFamily="2" charset="2"/>
-              </a:rPr>
-              <a:t></a:t>
-            </a:r>
-            <a:r>
-              <a:rPr lang="fr-FR" dirty="0" err="1">
-                <a:sym typeface="Wingdings" panose="05000000000000000000" pitchFamily="2" charset="2"/>
-              </a:rPr>
-              <a:t>snowflake</a:t>
-            </a:r>
-            <a:endParaRPr lang="fr-FR" dirty="0"/>
-          </a:p>
-        </p:txBody>
-      </p:sp>
-    </p:spTree>
-    <p:extLst>
-      <p:ext uri="{BB962C8B-B14F-4D97-AF65-F5344CB8AC3E}">
-        <p14:creationId xmlns:p14="http://schemas.microsoft.com/office/powerpoint/2010/main" val="3556524927"/>
       </p:ext>
     </p:extLst>
   </p:cSld>

--- a/Presentation stage 2ème année.pptx
+++ b/Presentation stage 2ème année.pptx
@@ -11,8 +11,8 @@
     <p:sldId id="256" r:id="rId2"/>
     <p:sldId id="257" r:id="rId3"/>
     <p:sldId id="259" r:id="rId4"/>
-    <p:sldId id="264" r:id="rId5"/>
-    <p:sldId id="265" r:id="rId6"/>
+    <p:sldId id="265" r:id="rId5"/>
+    <p:sldId id="266" r:id="rId6"/>
   </p:sldIdLst>
   <p:sldSz cx="12192000" cy="6858000"/>
   <p:notesSz cx="6858000" cy="9144000"/>
@@ -831,7 +831,7 @@
           <a:p>
             <a:fld id="{D0984811-7D92-41F6-B58D-401860CE2567}" type="datetimeFigureOut">
               <a:rPr lang="fr-FR" smtClean="0"/>
-              <a:t>01/05/2026</a:t>
+              <a:t>04/05/2026</a:t>
             </a:fld>
             <a:endParaRPr lang="fr-FR"/>
           </a:p>
@@ -1222,7 +1222,73 @@
             </a:r>
           </a:p>
           <a:p>
-            <a:endParaRPr lang="fr-FR" dirty="0"/>
+            <a:pPr lvl="1"/>
+            <a:r>
+              <a:rPr lang="fr-FR" dirty="0"/>
+              <a:t>Domaine d'activité</a:t>
+            </a:r>
+            <a:endParaRPr lang="fr-FR" sz="1200" dirty="0">
+              <a:solidFill>
+                <a:srgbClr val="282727"/>
+              </a:solidFill>
+              <a:ea typeface="+mn-lt"/>
+              <a:cs typeface="+mn-lt"/>
+            </a:endParaRPr>
+          </a:p>
+          <a:p>
+            <a:pPr algn="l"/>
+            <a:r>
+              <a:rPr lang="fr-FR" sz="1200" b="1" dirty="0"/>
+              <a:t>Santé:</a:t>
+            </a:r>
+          </a:p>
+          <a:p>
+            <a:pPr marL="457200" indent="-457200">
+              <a:buFont typeface="Courier New"/>
+              <a:buChar char="o"/>
+            </a:pPr>
+            <a:r>
+              <a:rPr lang="fr-FR" sz="1200" dirty="0">
+                <a:ea typeface="+mn-lt"/>
+                <a:cs typeface="+mn-lt"/>
+              </a:rPr>
+              <a:t>Complémentaires santé individuelles et collectifs</a:t>
+            </a:r>
+          </a:p>
+          <a:p>
+            <a:pPr marL="457200" indent="-457200">
+              <a:buFont typeface="Courier New"/>
+              <a:buChar char="o"/>
+            </a:pPr>
+            <a:r>
+              <a:rPr lang="fr-FR" sz="1200" dirty="0">
+                <a:ea typeface="+mn-lt"/>
+                <a:cs typeface="+mn-lt"/>
+              </a:rPr>
+              <a:t>Couverture des frais médicaux, hospitalisation, soins courants</a:t>
+            </a:r>
+          </a:p>
+          <a:p>
+            <a:r>
+              <a:rPr lang="fr-FR" sz="1200" b="1" dirty="0">
+                <a:ea typeface="+mn-lt"/>
+                <a:cs typeface="+mn-lt"/>
+              </a:rPr>
+              <a:t>Prévoyance:</a:t>
+            </a:r>
+          </a:p>
+          <a:p>
+            <a:pPr marL="457200" indent="-457200">
+              <a:buFont typeface="Courier New"/>
+              <a:buChar char="o"/>
+            </a:pPr>
+            <a:r>
+              <a:rPr lang="fr-FR" sz="1200" dirty="0">
+                <a:ea typeface="+mn-lt"/>
+                <a:cs typeface="+mn-lt"/>
+              </a:rPr>
+              <a:t>Prévoyance individuelle et collective </a:t>
+            </a:r>
           </a:p>
           <a:p>
             <a:endParaRPr lang="fr-FR" dirty="0"/>
@@ -1381,7 +1447,7 @@
           <a:p>
             <a:fld id="{D5985EDB-9CB5-4924-892C-CEAA459BBE1E}" type="slidenum">
               <a:rPr lang="fr-FR" smtClean="0"/>
-              <a:t>5</a:t>
+              <a:t>4</a:t>
             </a:fld>
             <a:endParaRPr lang="fr-FR"/>
           </a:p>
@@ -1551,7 +1617,7 @@
           <a:p>
             <a:fld id="{C128FA71-3A18-48C0-980F-4B68F7F63042}" type="datetime1">
               <a:rPr lang="en-US" smtClean="0"/>
-              <a:t>5/1/2026</a:t>
+              <a:t>5/4/2026</a:t>
             </a:fld>
             <a:endParaRPr lang="en-US"/>
           </a:p>
@@ -1759,7 +1825,7 @@
           <a:p>
             <a:fld id="{7104EDB3-C0E8-45F8-9E1D-1B6C8D1880C0}" type="datetime1">
               <a:rPr lang="en-US" smtClean="0"/>
-              <a:t>5/1/2026</a:t>
+              <a:t>5/4/2026</a:t>
             </a:fld>
             <a:endParaRPr lang="en-US"/>
           </a:p>
@@ -1967,7 +2033,7 @@
           <a:p>
             <a:fld id="{9CF0EC4B-54ED-4041-B552-9BA760FA3DBA}" type="datetime1">
               <a:rPr lang="en-US" smtClean="0"/>
-              <a:t>5/1/2026</a:t>
+              <a:t>5/4/2026</a:t>
             </a:fld>
             <a:endParaRPr lang="en-US"/>
           </a:p>
@@ -2165,7 +2231,7 @@
           <a:p>
             <a:fld id="{51C1210E-201E-4473-82AC-2466F5386C38}" type="datetime1">
               <a:rPr lang="en-US" smtClean="0"/>
-              <a:t>5/1/2026</a:t>
+              <a:t>5/4/2026</a:t>
             </a:fld>
             <a:endParaRPr lang="en-US"/>
           </a:p>
@@ -2442,7 +2508,7 @@
           <a:p>
             <a:fld id="{B01EA198-6CAB-4B8F-B93F-1F9C8C4B6CE7}" type="datetime1">
               <a:rPr lang="en-US" smtClean="0"/>
-              <a:t>5/1/2026</a:t>
+              <a:t>5/4/2026</a:t>
             </a:fld>
             <a:endParaRPr lang="en-US"/>
           </a:p>
@@ -2712,7 +2778,7 @@
           <a:p>
             <a:fld id="{CA06041F-4525-44D5-AA4F-332294BF1F56}" type="datetime1">
               <a:rPr lang="en-US" smtClean="0"/>
-              <a:t>5/1/2026</a:t>
+              <a:t>5/4/2026</a:t>
             </a:fld>
             <a:endParaRPr lang="en-US"/>
           </a:p>
@@ -3134,7 +3200,7 @@
           <a:p>
             <a:fld id="{F9557091-BBDF-4EB9-BA6B-2BB67AC4FC0F}" type="datetime1">
               <a:rPr lang="en-US" smtClean="0"/>
-              <a:t>5/1/2026</a:t>
+              <a:t>5/4/2026</a:t>
             </a:fld>
             <a:endParaRPr lang="en-US"/>
           </a:p>
@@ -3275,7 +3341,7 @@
           <a:p>
             <a:fld id="{2D6B226B-77A6-410C-9796-083F278E0125}" type="datetime1">
               <a:rPr lang="en-US" smtClean="0"/>
-              <a:t>5/1/2026</a:t>
+              <a:t>5/4/2026</a:t>
             </a:fld>
             <a:endParaRPr lang="en-US"/>
           </a:p>
@@ -3388,7 +3454,7 @@
           <a:p>
             <a:fld id="{A23A578B-D289-4C40-8593-3D356C49DA58}" type="datetime1">
               <a:rPr lang="en-US" smtClean="0"/>
-              <a:t>5/1/2026</a:t>
+              <a:t>5/4/2026</a:t>
             </a:fld>
             <a:endParaRPr lang="en-US"/>
           </a:p>
@@ -3705,7 +3771,7 @@
           <a:p>
             <a:fld id="{713DFAE3-14DB-48A7-A80F-80DDB072CE3D}" type="datetime1">
               <a:rPr lang="en-US" smtClean="0"/>
-              <a:t>5/1/2026</a:t>
+              <a:t>5/4/2026</a:t>
             </a:fld>
             <a:endParaRPr lang="en-US"/>
           </a:p>
@@ -3998,7 +4064,7 @@
           <a:p>
             <a:fld id="{92C5EAEF-6478-4102-8F5D-A5FE9FC97ACB}" type="datetime1">
               <a:rPr lang="en-US" smtClean="0"/>
-              <a:t>5/1/2026</a:t>
+              <a:t>5/4/2026</a:t>
             </a:fld>
             <a:endParaRPr lang="en-US"/>
           </a:p>
@@ -4237,7 +4303,7 @@
           <a:p>
             <a:fld id="{67F45AC6-C491-4585-A584-9CE2AF7D5500}" type="datetime1">
               <a:rPr lang="en-US" smtClean="0"/>
-              <a:t>5/1/2026</a:t>
+              <a:t>5/4/2026</a:t>
             </a:fld>
             <a:endParaRPr lang="en-US"/>
           </a:p>
@@ -4758,8 +4824,16 @@
           <a:lstStyle/>
           <a:p>
             <a:r>
-              <a:rPr lang="fr-FR" sz="3600"/>
-              <a:t>Stage de 1ère année en BTS SIO SLAM</a:t>
+              <a:rPr lang="fr-FR" sz="3600" dirty="0"/>
+              <a:t>Stage de 2</a:t>
+            </a:r>
+            <a:r>
+              <a:rPr lang="fr-FR" sz="3600" baseline="30000" dirty="0"/>
+              <a:t>ème</a:t>
+            </a:r>
+            <a:r>
+              <a:rPr lang="fr-FR" sz="3600" dirty="0"/>
+              <a:t>  année en BTS SIO SLAM</a:t>
             </a:r>
           </a:p>
         </p:txBody>
@@ -4853,6 +4927,111 @@
           <a:chExt cx="0" cy="0"/>
         </a:xfrm>
       </p:grpSpPr>
+      <p:pic>
+        <p:nvPicPr>
+          <p:cNvPr id="4" name="Picture 4">
+            <a:extLst>
+              <a:ext uri="{FF2B5EF4-FFF2-40B4-BE49-F238E27FC236}">
+                <a16:creationId xmlns:a16="http://schemas.microsoft.com/office/drawing/2014/main" id="{7470D390-F084-B05F-FB5C-8761342F830E}"/>
+              </a:ext>
+            </a:extLst>
+          </p:cNvPr>
+          <p:cNvPicPr>
+            <a:picLocks noChangeAspect="1" noChangeArrowheads="1"/>
+          </p:cNvPicPr>
+          <p:nvPr/>
+        </p:nvPicPr>
+        <p:blipFill>
+          <a:blip r:embed="rId3">
+            <a:extLst>
+              <a:ext uri="{28A0092B-C50C-407E-A947-70E740481C1C}">
+                <a14:useLocalDpi xmlns:a14="http://schemas.microsoft.com/office/drawing/2010/main" val="0"/>
+              </a:ext>
+            </a:extLst>
+          </a:blip>
+          <a:srcRect/>
+          <a:stretch>
+            <a:fillRect/>
+          </a:stretch>
+        </p:blipFill>
+        <p:spPr bwMode="auto">
+          <a:xfrm>
+            <a:off x="0" y="0"/>
+            <a:ext cx="12191999" cy="6858000"/>
+          </a:xfrm>
+          <a:prstGeom prst="rect">
+            <a:avLst/>
+          </a:prstGeom>
+          <a:noFill/>
+          <a:extLst>
+            <a:ext uri="{909E8E84-426E-40DD-AFC4-6F175D3DCCD1}">
+              <a14:hiddenFill xmlns:a14="http://schemas.microsoft.com/office/drawing/2010/main">
+                <a:solidFill>
+                  <a:srgbClr val="FFFFFF"/>
+                </a:solidFill>
+              </a14:hiddenFill>
+            </a:ext>
+          </a:extLst>
+        </p:spPr>
+      </p:pic>
+      <p:sp>
+        <p:nvSpPr>
+          <p:cNvPr id="5" name="Rectangle 4">
+            <a:extLst>
+              <a:ext uri="{FF2B5EF4-FFF2-40B4-BE49-F238E27FC236}">
+                <a16:creationId xmlns:a16="http://schemas.microsoft.com/office/drawing/2014/main" id="{91D25942-5DF9-0615-A383-ED35455BF009}"/>
+              </a:ext>
+            </a:extLst>
+          </p:cNvPr>
+          <p:cNvSpPr/>
+          <p:nvPr/>
+        </p:nvSpPr>
+        <p:spPr>
+          <a:xfrm>
+            <a:off x="0" y="0"/>
+            <a:ext cx="12191999" cy="6858000"/>
+          </a:xfrm>
+          <a:prstGeom prst="rect">
+            <a:avLst/>
+          </a:prstGeom>
+          <a:solidFill>
+            <a:schemeClr val="lt1">
+              <a:alpha val="25000"/>
+            </a:schemeClr>
+          </a:solidFill>
+          <a:effectLst>
+            <a:outerShdw blurRad="50800" dist="50800" dir="5400000" sx="1000" sy="1000" algn="ctr" rotWithShape="0">
+              <a:srgbClr val="000000">
+                <a:alpha val="99000"/>
+              </a:srgbClr>
+            </a:outerShdw>
+            <a:reflection stA="95000" endPos="0" dist="50800" dir="5400000" sy="-100000" algn="bl" rotWithShape="0"/>
+            <a:softEdge rad="31750"/>
+          </a:effectLst>
+        </p:spPr>
+        <p:style>
+          <a:lnRef idx="2">
+            <a:schemeClr val="accent6"/>
+          </a:lnRef>
+          <a:fillRef idx="1">
+            <a:schemeClr val="lt1"/>
+          </a:fillRef>
+          <a:effectRef idx="0">
+            <a:schemeClr val="accent6"/>
+          </a:effectRef>
+          <a:fontRef idx="minor">
+            <a:schemeClr val="dk1"/>
+          </a:fontRef>
+        </p:style>
+        <p:txBody>
+          <a:bodyPr rtlCol="0" anchor="ctr"/>
+          <a:lstStyle/>
+          <a:p>
+            <a:pPr algn="ctr"/>
+            <a:endParaRPr lang="fr-FR"/>
+          </a:p>
+        </p:txBody>
+      </p:sp>
       <p:sp>
         <p:nvSpPr>
           <p:cNvPr id="2" name="Titre 1">
@@ -4874,9 +5053,10 @@
           <a:bodyPr/>
           <a:lstStyle/>
           <a:p>
-            <a:r>
-              <a:rPr lang="fr-FR"/>
-              <a:t>présentation</a:t>
+            <a:pPr algn="ctr"/>
+            <a:r>
+              <a:rPr lang="fr-FR" dirty="0"/>
+              <a:t>Présentation</a:t>
             </a:r>
           </a:p>
         </p:txBody>
@@ -4907,52 +5087,35 @@
             <a:pPr lvl="1"/>
             <a:r>
               <a:rPr lang="fr-FR" sz="2800" b="1" dirty="0">
-                <a:latin typeface="Arial"/>
-                <a:cs typeface="Arial"/>
+                <a:latin typeface="Arial" panose="020B0604020202020204" pitchFamily="34" charset="0"/>
+                <a:cs typeface="Arial" panose="020B0604020202020204" pitchFamily="34" charset="0"/>
               </a:rPr>
               <a:t>Date de création : </a:t>
             </a:r>
             <a:r>
               <a:rPr lang="fr-FR" sz="2800" b="1" dirty="0">
-                <a:solidFill>
-                  <a:srgbClr val="282727"/>
-                </a:solidFill>
-                <a:latin typeface="Arial"/>
+                <a:latin typeface="Arial" panose="020B0604020202020204" pitchFamily="34" charset="0"/>
                 <a:ea typeface="+mn-lt"/>
-                <a:cs typeface="+mn-lt"/>
+                <a:cs typeface="Arial" panose="020B0604020202020204" pitchFamily="34" charset="0"/>
               </a:rPr>
               <a:t> 1</a:t>
             </a:r>
             <a:r>
               <a:rPr lang="fr-FR" sz="2800" b="1" baseline="30000" dirty="0">
-                <a:solidFill>
-                  <a:srgbClr val="282727"/>
-                </a:solidFill>
-                <a:latin typeface="Arial"/>
+                <a:latin typeface="Arial" panose="020B0604020202020204" pitchFamily="34" charset="0"/>
                 <a:ea typeface="+mn-lt"/>
-                <a:cs typeface="Arial"/>
+                <a:cs typeface="Arial" panose="020B0604020202020204" pitchFamily="34" charset="0"/>
               </a:rPr>
               <a:t>er</a:t>
             </a:r>
             <a:r>
               <a:rPr lang="fr-FR" sz="2800" b="1" dirty="0">
-                <a:solidFill>
-                  <a:srgbClr val="282727"/>
-                </a:solidFill>
-                <a:latin typeface="Arial"/>
+                <a:latin typeface="Arial" panose="020B0604020202020204" pitchFamily="34" charset="0"/>
                 <a:ea typeface="+mn-lt"/>
-                <a:cs typeface="+mn-lt"/>
+                <a:cs typeface="Arial" panose="020B0604020202020204" pitchFamily="34" charset="0"/>
               </a:rPr>
               <a:t> janvier 2025</a:t>
             </a:r>
-            <a:endParaRPr lang="fr-FR" sz="2800" b="1" dirty="0">
-              <a:solidFill>
-                <a:srgbClr val="202122"/>
-              </a:solidFill>
-              <a:latin typeface="Arial"/>
-              <a:ea typeface="+mn-lt"/>
-              <a:cs typeface="+mn-lt"/>
-            </a:endParaRPr>
           </a:p>
           <a:p>
             <a:pPr lvl="1"/>
@@ -4968,97 +5131,71 @@
             <a:pPr lvl="1"/>
             <a:r>
               <a:rPr lang="fr-FR" sz="2800" b="1" dirty="0">
-                <a:solidFill>
-                  <a:srgbClr val="282727"/>
-                </a:solidFill>
-                <a:latin typeface="Arial"/>
+                <a:latin typeface="Arial" panose="020B0604020202020204" pitchFamily="34" charset="0"/>
+                <a:cs typeface="Arial" panose="020B0604020202020204" pitchFamily="34" charset="0"/>
               </a:rPr>
               <a:t>Statut : </a:t>
             </a:r>
             <a:r>
-              <a:rPr lang="fr-FR" sz="2800" dirty="0">
-                <a:solidFill>
-                  <a:srgbClr val="282727"/>
-                </a:solidFill>
-                <a:latin typeface="Arial"/>
+              <a:rPr lang="fr-FR" sz="2800" b="1" dirty="0">
+                <a:latin typeface="Arial" panose="020B0604020202020204" pitchFamily="34" charset="0"/>
                 <a:ea typeface="+mn-lt"/>
-                <a:cs typeface="+mn-lt"/>
+                <a:cs typeface="Arial" panose="020B0604020202020204" pitchFamily="34" charset="0"/>
               </a:rPr>
               <a:t>SA à conseil d'administration (S.A.I.)</a:t>
             </a:r>
+          </a:p>
+          <a:p>
+            <a:pPr lvl="1"/>
+            <a:r>
+              <a:rPr lang="fr-FR" sz="2800" b="1" dirty="0">
+                <a:latin typeface="Arial" panose="020B0604020202020204" pitchFamily="34" charset="0"/>
+                <a:cs typeface="Arial" panose="020B0604020202020204" pitchFamily="34" charset="0"/>
+              </a:rPr>
+              <a:t>Chef d'entreprise :</a:t>
+            </a:r>
+            <a:r>
+              <a:rPr lang="fr-FR" sz="2800" b="1" i="0" dirty="0">
+                <a:effectLst/>
+                <a:latin typeface="Arial" panose="020B0604020202020204" pitchFamily="34" charset="0"/>
+                <a:cs typeface="Arial" panose="020B0604020202020204" pitchFamily="34" charset="0"/>
+              </a:rPr>
+              <a:t> Christophe Harrigan</a:t>
+            </a:r>
             <a:endParaRPr lang="fr-FR" sz="2800" b="1" dirty="0">
-              <a:solidFill>
-                <a:srgbClr val="282727"/>
-              </a:solidFill>
-              <a:latin typeface="Arial"/>
-              <a:cs typeface="Arial"/>
+              <a:latin typeface="Arial" panose="020B0604020202020204" pitchFamily="34" charset="0"/>
+              <a:cs typeface="Arial" panose="020B0604020202020204" pitchFamily="34" charset="0"/>
             </a:endParaRPr>
           </a:p>
           <a:p>
             <a:pPr lvl="1"/>
             <a:r>
               <a:rPr lang="fr-FR" sz="2800" b="1" dirty="0">
-                <a:solidFill>
-                  <a:srgbClr val="282727"/>
-                </a:solidFill>
-                <a:latin typeface="Arial"/>
-                <a:cs typeface="Arial"/>
+                <a:latin typeface="Arial" panose="020B0604020202020204" pitchFamily="34" charset="0"/>
+                <a:cs typeface="Arial" panose="020B0604020202020204" pitchFamily="34" charset="0"/>
               </a:rPr>
-              <a:t>Chef d'entreprise : </a:t>
-            </a:r>
-            <a:r>
-              <a:rPr lang="fr-FR" sz="2800" dirty="0">
-                <a:solidFill>
-                  <a:srgbClr val="081D35"/>
-                </a:solidFill>
-                <a:latin typeface="Arial"/>
-                <a:ea typeface="+mn-lt"/>
-                <a:cs typeface="+mn-lt"/>
+              <a:t>Chiffres d'affaires:39,1 Md</a:t>
+            </a:r>
+          </a:p>
+          <a:p>
+            <a:pPr lvl="1"/>
+            <a:r>
+              <a:rPr lang="fr-FR" sz="2800" b="1" dirty="0">
+                <a:latin typeface="Arial" panose="020B0604020202020204" pitchFamily="34" charset="0"/>
+                <a:cs typeface="Arial" panose="020B0604020202020204" pitchFamily="34" charset="0"/>
               </a:rPr>
-              <a:t>Christophe HARRIGAN</a:t>
-            </a:r>
+              <a:t>11 rue Brillat savarin,13 arrondissement de paris </a:t>
+            </a:r>
+            <a:endParaRPr lang="fr-FR" sz="3200" b="1" dirty="0">
+              <a:latin typeface="Arial" panose="020B0604020202020204" pitchFamily="34" charset="0"/>
+              <a:cs typeface="Arial" panose="020B0604020202020204" pitchFamily="34" charset="0"/>
+            </a:endParaRPr>
           </a:p>
           <a:p>
             <a:pPr lvl="1"/>
-            <a:r>
-              <a:rPr lang="fr-FR" sz="2800" b="1" dirty="0">
-                <a:solidFill>
-                  <a:srgbClr val="282727"/>
-                </a:solidFill>
-                <a:latin typeface="Arial"/>
-                <a:cs typeface="Arial"/>
-              </a:rPr>
-              <a:t>Chiffres d'affaires:</a:t>
-            </a:r>
-            <a:r>
-              <a:rPr lang="fr-FR" sz="2800" dirty="0">
-                <a:solidFill>
-                  <a:srgbClr val="282727"/>
-                </a:solidFill>
-                <a:ea typeface="+mn-lt"/>
-                <a:cs typeface="+mn-lt"/>
-              </a:rPr>
-              <a:t>37,4 milliards d'euros en 2024</a:t>
-            </a:r>
-          </a:p>
-          <a:p>
-            <a:pPr lvl="1"/>
-            <a:endParaRPr lang="fr-FR" sz="2800" dirty="0">
-              <a:solidFill>
-                <a:srgbClr val="202122"/>
-              </a:solidFill>
-              <a:latin typeface="Arial"/>
-              <a:cs typeface="Arial"/>
-            </a:endParaRPr>
-          </a:p>
-          <a:p>
-            <a:pPr lvl="1"/>
-            <a:endParaRPr lang="fr-FR" sz="2800" dirty="0">
-              <a:solidFill>
-                <a:srgbClr val="202122"/>
-              </a:solidFill>
-              <a:latin typeface="Arial"/>
-              <a:cs typeface="Arial"/>
+            <a:endParaRPr lang="fr-FR" sz="1200" b="1" dirty="0">
+              <a:latin typeface="Arial" panose="020B0604020202020204" pitchFamily="34" charset="0"/>
+              <a:cs typeface="Arial" panose="020B0604020202020204" pitchFamily="34" charset="0"/>
             </a:endParaRPr>
           </a:p>
         </p:txBody>
@@ -5961,7 +6098,7 @@
           <p:cNvPr id="2" name="Titre 1">
             <a:extLst>
               <a:ext uri="{FF2B5EF4-FFF2-40B4-BE49-F238E27FC236}">
-                <a16:creationId xmlns:a16="http://schemas.microsoft.com/office/drawing/2014/main" id="{7B64D764-780F-6CDE-027F-5EA5B1D9020F}"/>
+                <a16:creationId xmlns:a16="http://schemas.microsoft.com/office/drawing/2014/main" id="{5D39E20B-EE24-1DBB-C4FB-ABE45F7FCF8E}"/>
               </a:ext>
             </a:extLst>
           </p:cNvPr>
@@ -5980,51 +6117,86 @@
             <a:pPr algn="ctr"/>
             <a:r>
               <a:rPr lang="fr-FR" dirty="0"/>
-              <a:t>Mon équipe</a:t>
-            </a:r>
-          </a:p>
-        </p:txBody>
-      </p:sp>
-      <p:pic>
-        <p:nvPicPr>
-          <p:cNvPr id="5" name="Image 4" descr="Une image contenant capture d’écran, texte&#10;&#10;Le contenu généré par l’IA peut être incorrect.">
-            <a:extLst>
-              <a:ext uri="{FF2B5EF4-FFF2-40B4-BE49-F238E27FC236}">
-                <a16:creationId xmlns:a16="http://schemas.microsoft.com/office/drawing/2014/main" id="{0B577FE4-F194-1152-8D61-889E7815050A}"/>
-              </a:ext>
-            </a:extLst>
-          </p:cNvPr>
-          <p:cNvPicPr>
-            <a:picLocks noChangeAspect="1"/>
-          </p:cNvPicPr>
-          <p:nvPr/>
-        </p:nvPicPr>
-        <p:blipFill>
-          <a:blip r:embed="rId2">
-            <a:extLst>
-              <a:ext uri="{28A0092B-C50C-407E-A947-70E740481C1C}">
-                <a14:useLocalDpi xmlns:a14="http://schemas.microsoft.com/office/drawing/2010/main" val="0"/>
-              </a:ext>
-            </a:extLst>
-          </a:blip>
-          <a:stretch>
-            <a:fillRect/>
-          </a:stretch>
-        </p:blipFill>
+              <a:t>Journée type</a:t>
+            </a:r>
+          </a:p>
+        </p:txBody>
+      </p:sp>
+      <p:sp>
+        <p:nvSpPr>
+          <p:cNvPr id="3" name="Espace réservé du contenu 2">
+            <a:extLst>
+              <a:ext uri="{FF2B5EF4-FFF2-40B4-BE49-F238E27FC236}">
+                <a16:creationId xmlns:a16="http://schemas.microsoft.com/office/drawing/2014/main" id="{D654BA91-BAEA-6714-9F84-0F10234AA0BD}"/>
+              </a:ext>
+            </a:extLst>
+          </p:cNvPr>
+          <p:cNvSpPr>
+            <a:spLocks noGrp="1"/>
+          </p:cNvSpPr>
+          <p:nvPr>
+            <p:ph idx="1"/>
+          </p:nvPr>
+        </p:nvSpPr>
         <p:spPr>
           <a:xfrm>
-            <a:off x="1303579" y="1519492"/>
-            <a:ext cx="9754961" cy="4286848"/>
+            <a:off x="612648" y="1825216"/>
+            <a:ext cx="11350727" cy="4610040"/>
           </a:xfrm>
-          <a:prstGeom prst="rect">
-            <a:avLst/>
-          </a:prstGeom>
         </p:spPr>
-      </p:pic>
+        <p:txBody>
+          <a:bodyPr vert="horz" lIns="91440" tIns="45720" rIns="91440" bIns="45720" rtlCol="0" anchor="t">
+            <a:normAutofit/>
+          </a:bodyPr>
+          <a:lstStyle/>
+          <a:p>
+            <a:r>
+              <a:rPr lang="fr-FR" dirty="0"/>
+              <a:t>Arriver au bureau à 9h</a:t>
+            </a:r>
+          </a:p>
+          <a:p>
+            <a:r>
+              <a:rPr lang="fr-FR" dirty="0"/>
+              <a:t>Réunion d’équipe 10h15</a:t>
+            </a:r>
+          </a:p>
+          <a:p>
+            <a:r>
+              <a:rPr lang="fr-FR" dirty="0"/>
+              <a:t>Avancement de mon projet en autonomie</a:t>
+            </a:r>
+          </a:p>
+          <a:p>
+            <a:r>
+              <a:rPr lang="fr-FR" dirty="0"/>
+              <a:t>Observation du travail de mes collègues </a:t>
+            </a:r>
+          </a:p>
+          <a:p>
+            <a:r>
+              <a:rPr lang="fr-FR" dirty="0"/>
+              <a:t>Reprises du projet en autonomie</a:t>
+            </a:r>
+          </a:p>
+          <a:p>
+            <a:r>
+              <a:rPr lang="fr-FR" dirty="0"/>
+              <a:t>Départ à 17h</a:t>
+            </a:r>
+          </a:p>
+          <a:p>
+            <a:endParaRPr lang="fr-FR" dirty="0"/>
+          </a:p>
+          <a:p>
+            <a:endParaRPr lang="fr-FR" dirty="0"/>
+          </a:p>
+        </p:txBody>
+      </p:sp>
     </p:spTree>
     <p:extLst>
       <p:ext uri="{BB962C8B-B14F-4D97-AF65-F5344CB8AC3E}">
-        <p14:creationId xmlns:p14="http://schemas.microsoft.com/office/powerpoint/2010/main" val="3549418651"/>
+        <p14:creationId xmlns:p14="http://schemas.microsoft.com/office/powerpoint/2010/main" val="1215615312"/>
       </p:ext>
     </p:extLst>
   </p:cSld>
@@ -6056,7 +6228,7 @@
           <p:cNvPr id="2" name="Titre 1">
             <a:extLst>
               <a:ext uri="{FF2B5EF4-FFF2-40B4-BE49-F238E27FC236}">
-                <a16:creationId xmlns:a16="http://schemas.microsoft.com/office/drawing/2014/main" id="{5D39E20B-EE24-1DBB-C4FB-ABE45F7FCF8E}"/>
+                <a16:creationId xmlns:a16="http://schemas.microsoft.com/office/drawing/2014/main" id="{2CF4969E-0ECE-4569-D7EE-B573E20E93B1}"/>
               </a:ext>
             </a:extLst>
           </p:cNvPr>
@@ -6065,96 +6237,30 @@
           </p:cNvSpPr>
           <p:nvPr>
             <p:ph type="title"/>
-          </p:nvPr>
-        </p:nvSpPr>
-        <p:spPr/>
-        <p:txBody>
-          <a:bodyPr/>
-          <a:lstStyle/>
-          <a:p>
-            <a:pPr algn="ctr"/>
-            <a:r>
-              <a:rPr lang="fr-FR" dirty="0"/>
-              <a:t>Journée type</a:t>
-            </a:r>
-          </a:p>
-        </p:txBody>
-      </p:sp>
-      <p:sp>
-        <p:nvSpPr>
-          <p:cNvPr id="3" name="Espace réservé du contenu 2">
-            <a:extLst>
-              <a:ext uri="{FF2B5EF4-FFF2-40B4-BE49-F238E27FC236}">
-                <a16:creationId xmlns:a16="http://schemas.microsoft.com/office/drawing/2014/main" id="{D654BA91-BAEA-6714-9F84-0F10234AA0BD}"/>
-              </a:ext>
-            </a:extLst>
-          </p:cNvPr>
-          <p:cNvSpPr>
-            <a:spLocks noGrp="1"/>
-          </p:cNvSpPr>
-          <p:nvPr>
-            <p:ph idx="1"/>
           </p:nvPr>
         </p:nvSpPr>
         <p:spPr>
           <a:xfrm>
-            <a:off x="612648" y="1825216"/>
-            <a:ext cx="11350727" cy="4610040"/>
+            <a:off x="604556" y="2862871"/>
+            <a:ext cx="10653578" cy="1132258"/>
           </a:xfrm>
         </p:spPr>
         <p:txBody>
-          <a:bodyPr vert="horz" lIns="91440" tIns="45720" rIns="91440" bIns="45720" rtlCol="0" anchor="t">
-            <a:normAutofit/>
-          </a:bodyPr>
-          <a:lstStyle/>
-          <a:p>
+          <a:bodyPr/>
+          <a:lstStyle/>
+          <a:p>
+            <a:pPr algn="ctr"/>
             <a:r>
               <a:rPr lang="fr-FR" dirty="0"/>
-              <a:t>Arriver au bureau à 9h</a:t>
-            </a:r>
-          </a:p>
-          <a:p>
-            <a:r>
-              <a:rPr lang="fr-FR" dirty="0"/>
-              <a:t>Réunion d’équipe 10h15</a:t>
-            </a:r>
-          </a:p>
-          <a:p>
-            <a:r>
-              <a:rPr lang="fr-FR" dirty="0"/>
-              <a:t>Avancement de mon projet en autonomie</a:t>
-            </a:r>
-          </a:p>
-          <a:p>
-            <a:r>
-              <a:rPr lang="fr-FR" dirty="0"/>
-              <a:t>Observation du travail de mes collègues </a:t>
-            </a:r>
-          </a:p>
-          <a:p>
-            <a:r>
-              <a:rPr lang="fr-FR" dirty="0"/>
-              <a:t>Reprises du projet en autonomie</a:t>
-            </a:r>
-          </a:p>
-          <a:p>
-            <a:r>
-              <a:rPr lang="fr-FR" dirty="0"/>
-              <a:t>Départ à 17h</a:t>
-            </a:r>
-          </a:p>
-          <a:p>
-            <a:endParaRPr lang="fr-FR" dirty="0"/>
-          </a:p>
-          <a:p>
-            <a:endParaRPr lang="fr-FR" dirty="0"/>
+              <a:t>Conclusion</a:t>
+            </a:r>
           </a:p>
         </p:txBody>
       </p:sp>
     </p:spTree>
     <p:extLst>
       <p:ext uri="{BB962C8B-B14F-4D97-AF65-F5344CB8AC3E}">
-        <p14:creationId xmlns:p14="http://schemas.microsoft.com/office/powerpoint/2010/main" val="1215615312"/>
+        <p14:creationId xmlns:p14="http://schemas.microsoft.com/office/powerpoint/2010/main" val="1285169544"/>
       </p:ext>
     </p:extLst>
   </p:cSld>

--- a/Presentation stage 2ème année.pptx
+++ b/Presentation stage 2ème année.pptx
@@ -831,7 +831,7 @@
           <a:p>
             <a:fld id="{D0984811-7D92-41F6-B58D-401860CE2567}" type="datetimeFigureOut">
               <a:rPr lang="fr-FR" smtClean="0"/>
-              <a:t>04/05/2026</a:t>
+              <a:t>05/05/2026</a:t>
             </a:fld>
             <a:endParaRPr lang="fr-FR"/>
           </a:p>
@@ -1142,155 +1142,6 @@
           <a:bodyPr/>
           <a:lstStyle/>
           <a:p>
-            <a:pPr lvl="1"/>
-            <a:r>
-              <a:rPr lang="fr-FR" sz="1200" dirty="0">
-                <a:solidFill>
-                  <a:srgbClr val="282727"/>
-                </a:solidFill>
-                <a:ea typeface="+mn-lt"/>
-                <a:cs typeface="+mn-lt"/>
-              </a:rPr>
-              <a:t>détenue à 65% par CNP Assurances</a:t>
-            </a:r>
-            <a:endParaRPr lang="fr-FR" sz="1200" b="1" dirty="0">
-              <a:solidFill>
-                <a:srgbClr val="282727"/>
-              </a:solidFill>
-              <a:ea typeface="+mn-lt"/>
-              <a:cs typeface="+mn-lt"/>
-            </a:endParaRPr>
-          </a:p>
-          <a:p>
-            <a:pPr lvl="1"/>
-            <a:r>
-              <a:rPr lang="fr-FR" sz="1200" dirty="0">
-                <a:solidFill>
-                  <a:srgbClr val="282727"/>
-                </a:solidFill>
-                <a:ea typeface="+mn-lt"/>
-                <a:cs typeface="+mn-lt"/>
-              </a:rPr>
-              <a:t>Détenus à 35% par la mutuelle général</a:t>
-            </a:r>
-          </a:p>
-          <a:p>
-            <a:pPr marL="457200" marR="0" lvl="1" indent="0" algn="l" defTabSz="914400" rtl="0" eaLnBrk="1" fontAlgn="auto" latinLnBrk="0" hangingPunct="1">
-              <a:lnSpc>
-                <a:spcPct val="100000"/>
-              </a:lnSpc>
-              <a:spcBef>
-                <a:spcPts val="0"/>
-              </a:spcBef>
-              <a:spcAft>
-                <a:spcPts val="0"/>
-              </a:spcAft>
-              <a:buClrTx/>
-              <a:buSzTx/>
-              <a:buFontTx/>
-              <a:buNone/>
-              <a:tabLst/>
-              <a:defRPr/>
-            </a:pPr>
-            <a:r>
-              <a:rPr lang="fr-FR" sz="1200" b="1" dirty="0">
-                <a:latin typeface="Arial" panose="020B0604020202020204" pitchFamily="34" charset="0"/>
-                <a:ea typeface="+mn-lt"/>
-                <a:cs typeface="Arial" panose="020B0604020202020204" pitchFamily="34" charset="0"/>
-              </a:rPr>
-              <a:t>regroupe 1 300 collaborateurs de La Mutuelle Générale</a:t>
-            </a:r>
-            <a:endParaRPr lang="fr-FR" sz="1200" dirty="0">
-              <a:solidFill>
-                <a:srgbClr val="282727"/>
-              </a:solidFill>
-              <a:ea typeface="+mn-lt"/>
-              <a:cs typeface="+mn-lt"/>
-            </a:endParaRPr>
-          </a:p>
-          <a:p>
-            <a:pPr lvl="1"/>
-            <a:r>
-              <a:rPr lang="fr-FR" sz="1200" dirty="0">
-                <a:solidFill>
-                  <a:srgbClr val="282727"/>
-                </a:solidFill>
-                <a:ea typeface="+mn-lt"/>
-                <a:cs typeface="+mn-lt"/>
-              </a:rPr>
-              <a:t>Augmentations du chiffres d’affaire de 8,6%</a:t>
-            </a:r>
-          </a:p>
-          <a:p>
-            <a:pPr lvl="1"/>
-            <a:r>
-              <a:rPr lang="fr-FR" dirty="0"/>
-              <a:t>Domaine d'activité</a:t>
-            </a:r>
-            <a:endParaRPr lang="fr-FR" sz="1200" dirty="0">
-              <a:solidFill>
-                <a:srgbClr val="282727"/>
-              </a:solidFill>
-              <a:ea typeface="+mn-lt"/>
-              <a:cs typeface="+mn-lt"/>
-            </a:endParaRPr>
-          </a:p>
-          <a:p>
-            <a:pPr algn="l"/>
-            <a:r>
-              <a:rPr lang="fr-FR" sz="1200" b="1" dirty="0"/>
-              <a:t>Santé:</a:t>
-            </a:r>
-          </a:p>
-          <a:p>
-            <a:pPr marL="457200" indent="-457200">
-              <a:buFont typeface="Courier New"/>
-              <a:buChar char="o"/>
-            </a:pPr>
-            <a:r>
-              <a:rPr lang="fr-FR" sz="1200" dirty="0">
-                <a:ea typeface="+mn-lt"/>
-                <a:cs typeface="+mn-lt"/>
-              </a:rPr>
-              <a:t>Complémentaires santé individuelles et collectifs</a:t>
-            </a:r>
-          </a:p>
-          <a:p>
-            <a:pPr marL="457200" indent="-457200">
-              <a:buFont typeface="Courier New"/>
-              <a:buChar char="o"/>
-            </a:pPr>
-            <a:r>
-              <a:rPr lang="fr-FR" sz="1200" dirty="0">
-                <a:ea typeface="+mn-lt"/>
-                <a:cs typeface="+mn-lt"/>
-              </a:rPr>
-              <a:t>Couverture des frais médicaux, hospitalisation, soins courants</a:t>
-            </a:r>
-          </a:p>
-          <a:p>
-            <a:r>
-              <a:rPr lang="fr-FR" sz="1200" b="1" dirty="0">
-                <a:ea typeface="+mn-lt"/>
-                <a:cs typeface="+mn-lt"/>
-              </a:rPr>
-              <a:t>Prévoyance:</a:t>
-            </a:r>
-          </a:p>
-          <a:p>
-            <a:pPr marL="457200" indent="-457200">
-              <a:buFont typeface="Courier New"/>
-              <a:buChar char="o"/>
-            </a:pPr>
-            <a:r>
-              <a:rPr lang="fr-FR" sz="1200" dirty="0">
-                <a:ea typeface="+mn-lt"/>
-                <a:cs typeface="+mn-lt"/>
-              </a:rPr>
-              <a:t>Prévoyance individuelle et collective </a:t>
-            </a:r>
-          </a:p>
-          <a:p>
             <a:endParaRPr lang="fr-FR" dirty="0"/>
           </a:p>
         </p:txBody>
@@ -1374,57 +1225,6 @@
         <p:txBody>
           <a:bodyPr/>
           <a:lstStyle/>
-          <a:p>
-            <a:r>
-              <a:rPr lang="fr-FR" dirty="0"/>
-              <a:t>Qu'est-ce que j'ai fait durant mon stage?</a:t>
-            </a:r>
-          </a:p>
-          <a:p>
-            <a:r>
-              <a:rPr lang="fr-FR" dirty="0"/>
-              <a:t>2 jours à l'entreprise et 3 jours en télétravail</a:t>
-            </a:r>
-          </a:p>
-          <a:p>
-            <a:r>
-              <a:rPr lang="fr-FR" dirty="0"/>
-              <a:t>Manipulation de données brutes, leurs nettoyage et leurs transformations avec informatica</a:t>
-            </a:r>
-          </a:p>
-          <a:p>
-            <a:r>
-              <a:rPr lang="fr-FR" dirty="0"/>
-              <a:t>Interrogation des données avec </a:t>
-            </a:r>
-            <a:r>
-              <a:rPr lang="fr-FR" dirty="0" err="1"/>
-              <a:t>snowflack</a:t>
-            </a:r>
-            <a:endParaRPr lang="fr-FR" dirty="0"/>
-          </a:p>
-          <a:p>
-            <a:r>
-              <a:rPr lang="fr-FR" dirty="0"/>
-              <a:t>Tri de base de données et vérification de celle-ci </a:t>
-            </a:r>
-            <a:r>
-              <a:rPr lang="fr-FR" dirty="0">
-                <a:sym typeface="Wingdings" panose="05000000000000000000" pitchFamily="2" charset="2"/>
-              </a:rPr>
-              <a:t></a:t>
-            </a:r>
-            <a:r>
-              <a:rPr lang="fr-FR" dirty="0" err="1">
-                <a:sym typeface="Wingdings" panose="05000000000000000000" pitchFamily="2" charset="2"/>
-              </a:rPr>
-              <a:t>snowflake</a:t>
-            </a:r>
-            <a:endParaRPr lang="fr-FR" dirty="0"/>
-          </a:p>
-          <a:p>
-            <a:endParaRPr lang="fr-FR" dirty="0"/>
-          </a:p>
           <a:p>
             <a:endParaRPr lang="fr-FR" dirty="0"/>
           </a:p>
@@ -1617,7 +1417,7 @@
           <a:p>
             <a:fld id="{C128FA71-3A18-48C0-980F-4B68F7F63042}" type="datetime1">
               <a:rPr lang="en-US" smtClean="0"/>
-              <a:t>5/4/2026</a:t>
+              <a:t>5/5/2026</a:t>
             </a:fld>
             <a:endParaRPr lang="en-US"/>
           </a:p>
@@ -1825,7 +1625,7 @@
           <a:p>
             <a:fld id="{7104EDB3-C0E8-45F8-9E1D-1B6C8D1880C0}" type="datetime1">
               <a:rPr lang="en-US" smtClean="0"/>
-              <a:t>5/4/2026</a:t>
+              <a:t>5/5/2026</a:t>
             </a:fld>
             <a:endParaRPr lang="en-US"/>
           </a:p>
@@ -2033,7 +1833,7 @@
           <a:p>
             <a:fld id="{9CF0EC4B-54ED-4041-B552-9BA760FA3DBA}" type="datetime1">
               <a:rPr lang="en-US" smtClean="0"/>
-              <a:t>5/4/2026</a:t>
+              <a:t>5/5/2026</a:t>
             </a:fld>
             <a:endParaRPr lang="en-US"/>
           </a:p>
@@ -2231,7 +2031,7 @@
           <a:p>
             <a:fld id="{51C1210E-201E-4473-82AC-2466F5386C38}" type="datetime1">
               <a:rPr lang="en-US" smtClean="0"/>
-              <a:t>5/4/2026</a:t>
+              <a:t>5/5/2026</a:t>
             </a:fld>
             <a:endParaRPr lang="en-US"/>
           </a:p>
@@ -2508,7 +2308,7 @@
           <a:p>
             <a:fld id="{B01EA198-6CAB-4B8F-B93F-1F9C8C4B6CE7}" type="datetime1">
               <a:rPr lang="en-US" smtClean="0"/>
-              <a:t>5/4/2026</a:t>
+              <a:t>5/5/2026</a:t>
             </a:fld>
             <a:endParaRPr lang="en-US"/>
           </a:p>
@@ -2778,7 +2578,7 @@
           <a:p>
             <a:fld id="{CA06041F-4525-44D5-AA4F-332294BF1F56}" type="datetime1">
               <a:rPr lang="en-US" smtClean="0"/>
-              <a:t>5/4/2026</a:t>
+              <a:t>5/5/2026</a:t>
             </a:fld>
             <a:endParaRPr lang="en-US"/>
           </a:p>
@@ -3200,7 +3000,7 @@
           <a:p>
             <a:fld id="{F9557091-BBDF-4EB9-BA6B-2BB67AC4FC0F}" type="datetime1">
               <a:rPr lang="en-US" smtClean="0"/>
-              <a:t>5/4/2026</a:t>
+              <a:t>5/5/2026</a:t>
             </a:fld>
             <a:endParaRPr lang="en-US"/>
           </a:p>
@@ -3341,7 +3141,7 @@
           <a:p>
             <a:fld id="{2D6B226B-77A6-410C-9796-083F278E0125}" type="datetime1">
               <a:rPr lang="en-US" smtClean="0"/>
-              <a:t>5/4/2026</a:t>
+              <a:t>5/5/2026</a:t>
             </a:fld>
             <a:endParaRPr lang="en-US"/>
           </a:p>
@@ -3454,7 +3254,7 @@
           <a:p>
             <a:fld id="{A23A578B-D289-4C40-8593-3D356C49DA58}" type="datetime1">
               <a:rPr lang="en-US" smtClean="0"/>
-              <a:t>5/4/2026</a:t>
+              <a:t>5/5/2026</a:t>
             </a:fld>
             <a:endParaRPr lang="en-US"/>
           </a:p>
@@ -3771,7 +3571,7 @@
           <a:p>
             <a:fld id="{713DFAE3-14DB-48A7-A80F-80DDB072CE3D}" type="datetime1">
               <a:rPr lang="en-US" smtClean="0"/>
-              <a:t>5/4/2026</a:t>
+              <a:t>5/5/2026</a:t>
             </a:fld>
             <a:endParaRPr lang="en-US"/>
           </a:p>
@@ -4064,7 +3864,7 @@
           <a:p>
             <a:fld id="{92C5EAEF-6478-4102-8F5D-A5FE9FC97ACB}" type="datetime1">
               <a:rPr lang="en-US" smtClean="0"/>
-              <a:t>5/4/2026</a:t>
+              <a:t>5/5/2026</a:t>
             </a:fld>
             <a:endParaRPr lang="en-US"/>
           </a:p>
@@ -4303,7 +4103,7 @@
           <a:p>
             <a:fld id="{67F45AC6-C491-4585-A584-9CE2AF7D5500}" type="datetime1">
               <a:rPr lang="en-US" smtClean="0"/>
-              <a:t>5/4/2026</a:t>
+              <a:t>5/5/2026</a:t>
             </a:fld>
             <a:endParaRPr lang="en-US"/>
           </a:p>
